--- a/chapter10/chapter10.pptx
+++ b/chapter10/chapter10.pptx
@@ -10721,10 +10721,12 @@
           </a:bodyPr>
           <a:lstStyle/>
           <a:p>
-            <a:pPr>
+            <a:pPr lvl="0" marL="457200" indent="-228600">
+              <a:buFont typeface="Calibri"/>
               <a:spcAft>
                 <a:spcPts val="1000"/>
               </a:spcAft>
+              <a:buSzPct val="100000"/>
               <a:buChar char="•"/>
               <a:lnSpc>
                 <a:spcPts val="2200"/>
@@ -10741,10 +10743,12 @@
             </a:r>
           </a:p>
           <a:p>
-            <a:pPr>
+            <a:pPr lvl="0" marL="457200" indent="-228600">
+              <a:buFont typeface="Calibri"/>
               <a:spcAft>
                 <a:spcPts val="1000"/>
               </a:spcAft>
+              <a:buSzPct val="100000"/>
               <a:buChar char="•"/>
               <a:lnSpc>
                 <a:spcPts val="2200"/>
@@ -10880,10 +10884,12 @@
           </a:bodyPr>
           <a:lstStyle/>
           <a:p>
-            <a:pPr>
+            <a:pPr lvl="0" marL="457200" indent="-228600">
+              <a:buFont typeface="Calibri"/>
               <a:spcAft>
                 <a:spcPts val="1000"/>
               </a:spcAft>
+              <a:buSzPct val="100000"/>
               <a:buChar char="•"/>
               <a:lnSpc>
                 <a:spcPts val="2200"/>
@@ -10900,10 +10906,12 @@
             </a:r>
           </a:p>
           <a:p>
-            <a:pPr>
+            <a:pPr lvl="0" marL="457200" indent="-228600">
+              <a:buFont typeface="Calibri"/>
               <a:spcAft>
                 <a:spcPts val="1000"/>
               </a:spcAft>
+              <a:buSzPct val="100000"/>
               <a:buChar char="•"/>
               <a:lnSpc>
                 <a:spcPts val="2200"/>
@@ -11039,10 +11047,12 @@
           </a:bodyPr>
           <a:lstStyle/>
           <a:p>
-            <a:pPr>
+            <a:pPr lvl="0" marL="457200" indent="-228600">
+              <a:buFont typeface="Calibri"/>
               <a:spcAft>
                 <a:spcPts val="1000"/>
               </a:spcAft>
+              <a:buSzPct val="100000"/>
               <a:buChar char="•"/>
               <a:lnSpc>
                 <a:spcPts val="2200"/>
@@ -11059,10 +11069,12 @@
             </a:r>
           </a:p>
           <a:p>
-            <a:pPr>
+            <a:pPr lvl="0" marL="457200" indent="-228600">
+              <a:buFont typeface="Calibri"/>
               <a:spcAft>
                 <a:spcPts val="1000"/>
               </a:spcAft>
+              <a:buSzPct val="100000"/>
               <a:buChar char="•"/>
               <a:lnSpc>
                 <a:spcPts val="2200"/>
@@ -11079,10 +11091,12 @@
             </a:r>
           </a:p>
           <a:p>
-            <a:pPr>
+            <a:pPr lvl="0" marL="457200" indent="-228600">
+              <a:buFont typeface="Calibri"/>
               <a:spcAft>
                 <a:spcPts val="1000"/>
               </a:spcAft>
+              <a:buSzPct val="100000"/>
               <a:buChar char="•"/>
               <a:lnSpc>
                 <a:spcPts val="2200"/>
@@ -11099,10 +11113,12 @@
             </a:r>
           </a:p>
           <a:p>
-            <a:pPr>
+            <a:pPr lvl="0" marL="457200" indent="-228600">
+              <a:buFont typeface="Calibri"/>
               <a:spcAft>
                 <a:spcPts val="1000"/>
               </a:spcAft>
+              <a:buSzPct val="100000"/>
               <a:buChar char="•"/>
               <a:lnSpc>
                 <a:spcPts val="2200"/>
@@ -11238,10 +11254,12 @@
           </a:bodyPr>
           <a:lstStyle/>
           <a:p>
-            <a:pPr>
+            <a:pPr lvl="0" marL="457200" indent="-228600">
+              <a:buFont typeface="Calibri"/>
               <a:spcAft>
                 <a:spcPts val="1000"/>
               </a:spcAft>
+              <a:buSzPct val="100000"/>
               <a:buChar char="•"/>
               <a:lnSpc>
                 <a:spcPts val="2200"/>
@@ -11258,10 +11276,12 @@
             </a:r>
           </a:p>
           <a:p>
-            <a:pPr>
+            <a:pPr lvl="0" marL="457200" indent="-228600">
+              <a:buFont typeface="Calibri"/>
               <a:spcAft>
                 <a:spcPts val="1000"/>
               </a:spcAft>
+              <a:buSzPct val="100000"/>
               <a:buChar char="•"/>
               <a:lnSpc>
                 <a:spcPts val="2200"/>
@@ -11397,10 +11417,12 @@
           </a:bodyPr>
           <a:lstStyle/>
           <a:p>
-            <a:pPr>
+            <a:pPr lvl="0" marL="457200" indent="-228600">
+              <a:buFont typeface="Calibri"/>
               <a:spcAft>
                 <a:spcPts val="1000"/>
               </a:spcAft>
+              <a:buSzPct val="100000"/>
               <a:buChar char="•"/>
               <a:lnSpc>
                 <a:spcPts val="2200"/>
@@ -11417,10 +11439,12 @@
             </a:r>
           </a:p>
           <a:p>
-            <a:pPr>
+            <a:pPr lvl="0" marL="457200" indent="-228600">
+              <a:buFont typeface="Calibri"/>
               <a:spcAft>
                 <a:spcPts val="1000"/>
               </a:spcAft>
+              <a:buSzPct val="100000"/>
               <a:buChar char="•"/>
               <a:lnSpc>
                 <a:spcPts val="2200"/>
@@ -11437,10 +11461,12 @@
             </a:r>
           </a:p>
           <a:p>
-            <a:pPr>
+            <a:pPr lvl="0" marL="457200" indent="-228600">
+              <a:buFont typeface="Calibri"/>
               <a:spcAft>
                 <a:spcPts val="1000"/>
               </a:spcAft>
+              <a:buSzPct val="100000"/>
               <a:buChar char="•"/>
               <a:lnSpc>
                 <a:spcPts val="2200"/>
@@ -11457,10 +11483,12 @@
             </a:r>
           </a:p>
           <a:p>
-            <a:pPr>
+            <a:pPr lvl="0" marL="457200" indent="-228600">
+              <a:buFont typeface="Calibri"/>
               <a:spcAft>
                 <a:spcPts val="1000"/>
               </a:spcAft>
+              <a:buSzPct val="100000"/>
               <a:buChar char="•"/>
               <a:lnSpc>
                 <a:spcPts val="2200"/>
@@ -11596,10 +11624,12 @@
           </a:bodyPr>
           <a:lstStyle/>
           <a:p>
-            <a:pPr>
+            <a:pPr lvl="0" marL="457200" indent="-228600">
+              <a:buFont typeface="Calibri"/>
               <a:spcAft>
                 <a:spcPts val="1000"/>
               </a:spcAft>
+              <a:buSzPct val="100000"/>
               <a:buChar char="•"/>
               <a:lnSpc>
                 <a:spcPts val="2200"/>
@@ -11616,10 +11646,12 @@
             </a:r>
           </a:p>
           <a:p>
-            <a:pPr>
+            <a:pPr lvl="0" marL="457200" indent="-228600">
+              <a:buFont typeface="Calibri"/>
               <a:spcAft>
                 <a:spcPts val="1000"/>
               </a:spcAft>
+              <a:buSzPct val="100000"/>
               <a:buChar char="•"/>
               <a:lnSpc>
                 <a:spcPts val="2200"/>
@@ -11636,10 +11668,12 @@
             </a:r>
           </a:p>
           <a:p>
-            <a:pPr>
+            <a:pPr lvl="0" marL="457200" indent="-228600">
+              <a:buFont typeface="Calibri"/>
               <a:spcAft>
                 <a:spcPts val="1000"/>
               </a:spcAft>
+              <a:buSzPct val="100000"/>
               <a:buChar char="•"/>
               <a:lnSpc>
                 <a:spcPts val="2200"/>
@@ -11775,10 +11809,12 @@
           </a:bodyPr>
           <a:lstStyle/>
           <a:p>
-            <a:pPr>
+            <a:pPr lvl="0" marL="457200" indent="-228600">
+              <a:buFont typeface="Calibri"/>
               <a:spcAft>
                 <a:spcPts val="1000"/>
               </a:spcAft>
+              <a:buSzPct val="100000"/>
               <a:buChar char="•"/>
               <a:lnSpc>
                 <a:spcPts val="2200"/>
@@ -11795,10 +11831,12 @@
             </a:r>
           </a:p>
           <a:p>
-            <a:pPr>
+            <a:pPr lvl="0" marL="457200" indent="-228600">
+              <a:buFont typeface="Calibri"/>
               <a:spcAft>
                 <a:spcPts val="1000"/>
               </a:spcAft>
+              <a:buSzPct val="100000"/>
               <a:buChar char="•"/>
               <a:lnSpc>
                 <a:spcPts val="2200"/>
@@ -11934,10 +11972,12 @@
           </a:bodyPr>
           <a:lstStyle/>
           <a:p>
-            <a:pPr>
+            <a:pPr lvl="0" marL="457200" indent="-228600">
+              <a:buFont typeface="Calibri"/>
               <a:spcAft>
                 <a:spcPts val="1000"/>
               </a:spcAft>
+              <a:buSzPct val="100000"/>
               <a:buChar char="•"/>
               <a:lnSpc>
                 <a:spcPts val="2200"/>
@@ -12073,10 +12113,12 @@
           </a:bodyPr>
           <a:lstStyle/>
           <a:p>
-            <a:pPr>
+            <a:pPr lvl="0" marL="457200" indent="-228600">
+              <a:buFont typeface="Calibri"/>
               <a:spcAft>
                 <a:spcPts val="1000"/>
               </a:spcAft>
+              <a:buSzPct val="100000"/>
               <a:buChar char="•"/>
               <a:lnSpc>
                 <a:spcPts val="2200"/>
@@ -12093,10 +12135,12 @@
             </a:r>
           </a:p>
           <a:p>
-            <a:pPr>
+            <a:pPr lvl="0" marL="457200" indent="-228600">
+              <a:buFont typeface="Calibri"/>
               <a:spcAft>
                 <a:spcPts val="1000"/>
               </a:spcAft>
+              <a:buSzPct val="100000"/>
               <a:buChar char="•"/>
               <a:lnSpc>
                 <a:spcPts val="2200"/>
@@ -12113,10 +12157,12 @@
             </a:r>
           </a:p>
           <a:p>
-            <a:pPr>
+            <a:pPr lvl="0" marL="457200" indent="-228600">
+              <a:buFont typeface="Calibri"/>
               <a:spcAft>
                 <a:spcPts val="1000"/>
               </a:spcAft>
+              <a:buSzPct val="100000"/>
               <a:buChar char="•"/>
               <a:lnSpc>
                 <a:spcPts val="2200"/>
@@ -12252,10 +12298,12 @@
           </a:bodyPr>
           <a:lstStyle/>
           <a:p>
-            <a:pPr>
+            <a:pPr lvl="0" marL="457200" indent="-228600">
+              <a:buFont typeface="Calibri"/>
               <a:spcAft>
                 <a:spcPts val="1000"/>
               </a:spcAft>
+              <a:buSzPct val="100000"/>
               <a:buChar char="•"/>
               <a:lnSpc>
                 <a:spcPts val="2200"/>
@@ -12272,10 +12320,12 @@
             </a:r>
           </a:p>
           <a:p>
-            <a:pPr>
+            <a:pPr lvl="0" marL="457200" indent="-228600">
+              <a:buFont typeface="Calibri"/>
               <a:spcAft>
                 <a:spcPts val="1000"/>
               </a:spcAft>
+              <a:buSzPct val="100000"/>
               <a:buChar char="•"/>
               <a:lnSpc>
                 <a:spcPts val="2200"/>
@@ -12292,10 +12342,12 @@
             </a:r>
           </a:p>
           <a:p>
-            <a:pPr>
+            <a:pPr lvl="0" marL="457200" indent="-228600">
+              <a:buFont typeface="Calibri"/>
               <a:spcAft>
                 <a:spcPts val="1000"/>
               </a:spcAft>
+              <a:buSzPct val="100000"/>
               <a:buChar char="•"/>
               <a:lnSpc>
                 <a:spcPts val="2200"/>
@@ -12312,10 +12364,12 @@
             </a:r>
           </a:p>
           <a:p>
-            <a:pPr>
+            <a:pPr lvl="0" marL="457200" indent="-228600">
+              <a:buFont typeface="Calibri"/>
               <a:spcAft>
                 <a:spcPts val="1000"/>
               </a:spcAft>
+              <a:buSzPct val="100000"/>
               <a:buChar char="•"/>
               <a:lnSpc>
                 <a:spcPts val="2200"/>
@@ -12332,10 +12386,12 @@
             </a:r>
           </a:p>
           <a:p>
-            <a:pPr>
+            <a:pPr lvl="0" marL="457200" indent="-228600">
+              <a:buFont typeface="Calibri"/>
               <a:spcAft>
                 <a:spcPts val="1000"/>
               </a:spcAft>
+              <a:buSzPct val="100000"/>
               <a:buChar char="•"/>
               <a:lnSpc>
                 <a:spcPts val="2200"/>
@@ -12352,10 +12408,12 @@
             </a:r>
           </a:p>
           <a:p>
-            <a:pPr>
+            <a:pPr lvl="0" marL="457200" indent="-228600">
+              <a:buFont typeface="Calibri"/>
               <a:spcAft>
                 <a:spcPts val="1000"/>
               </a:spcAft>
+              <a:buSzPct val="100000"/>
               <a:buChar char="•"/>
               <a:lnSpc>
                 <a:spcPts val="2200"/>
@@ -12491,10 +12549,12 @@
           </a:bodyPr>
           <a:lstStyle/>
           <a:p>
-            <a:pPr>
+            <a:pPr lvl="0" marL="457200" indent="-228600">
+              <a:buFont typeface="Calibri"/>
               <a:spcAft>
                 <a:spcPts val="1000"/>
               </a:spcAft>
+              <a:buSzPct val="100000"/>
               <a:buChar char="•"/>
               <a:lnSpc>
                 <a:spcPts val="2200"/>
@@ -12511,10 +12571,12 @@
             </a:r>
           </a:p>
           <a:p>
-            <a:pPr>
+            <a:pPr lvl="0" marL="457200" indent="-228600">
+              <a:buFont typeface="Calibri"/>
               <a:spcAft>
                 <a:spcPts val="1000"/>
               </a:spcAft>
+              <a:buSzPct val="100000"/>
               <a:buChar char="•"/>
               <a:lnSpc>
                 <a:spcPts val="2200"/>
@@ -12531,10 +12593,12 @@
             </a:r>
           </a:p>
           <a:p>
-            <a:pPr>
+            <a:pPr lvl="0" marL="457200" indent="-228600">
+              <a:buFont typeface="Calibri"/>
               <a:spcAft>
                 <a:spcPts val="1000"/>
               </a:spcAft>
+              <a:buSzPct val="100000"/>
               <a:buChar char="•"/>
               <a:lnSpc>
                 <a:spcPts val="2200"/>
@@ -12670,10 +12734,12 @@
           </a:bodyPr>
           <a:lstStyle/>
           <a:p>
-            <a:pPr>
+            <a:pPr lvl="0" marL="457200" indent="-228600">
+              <a:buFont typeface="Calibri"/>
               <a:spcAft>
                 <a:spcPts val="1000"/>
               </a:spcAft>
+              <a:buSzPct val="100000"/>
               <a:buChar char="•"/>
               <a:lnSpc>
                 <a:spcPts val="2200"/>
@@ -12690,10 +12756,12 @@
             </a:r>
           </a:p>
           <a:p>
-            <a:pPr>
+            <a:pPr lvl="0" marL="457200" indent="-228600">
+              <a:buFont typeface="Calibri"/>
               <a:spcAft>
                 <a:spcPts val="1000"/>
               </a:spcAft>
+              <a:buSzPct val="100000"/>
               <a:buChar char="•"/>
               <a:lnSpc>
                 <a:spcPts val="2200"/>
@@ -12829,10 +12897,12 @@
           </a:bodyPr>
           <a:lstStyle/>
           <a:p>
-            <a:pPr>
+            <a:pPr lvl="0" marL="457200" indent="-228600">
+              <a:buFont typeface="Calibri"/>
               <a:spcAft>
                 <a:spcPts val="1000"/>
               </a:spcAft>
+              <a:buSzPct val="100000"/>
               <a:buChar char="•"/>
               <a:lnSpc>
                 <a:spcPts val="2200"/>
@@ -12849,10 +12919,12 @@
             </a:r>
           </a:p>
           <a:p>
-            <a:pPr>
+            <a:pPr lvl="0" marL="457200" indent="-228600">
+              <a:buFont typeface="Calibri"/>
               <a:spcAft>
                 <a:spcPts val="1000"/>
               </a:spcAft>
+              <a:buSzPct val="100000"/>
               <a:buChar char="•"/>
               <a:lnSpc>
                 <a:spcPts val="2200"/>
@@ -12869,10 +12941,12 @@
             </a:r>
           </a:p>
           <a:p>
-            <a:pPr>
+            <a:pPr lvl="0" marL="457200" indent="-228600">
+              <a:buFont typeface="Calibri"/>
               <a:spcAft>
                 <a:spcPts val="1000"/>
               </a:spcAft>
+              <a:buSzPct val="100000"/>
               <a:buChar char="•"/>
               <a:lnSpc>
                 <a:spcPts val="2200"/>
@@ -12889,10 +12963,12 @@
             </a:r>
           </a:p>
           <a:p>
-            <a:pPr>
+            <a:pPr lvl="0" marL="457200" indent="-228600">
+              <a:buFont typeface="Calibri"/>
               <a:spcAft>
                 <a:spcPts val="1000"/>
               </a:spcAft>
+              <a:buSzPct val="100000"/>
               <a:buChar char="•"/>
               <a:lnSpc>
                 <a:spcPts val="2200"/>
@@ -12909,10 +12985,12 @@
             </a:r>
           </a:p>
           <a:p>
-            <a:pPr>
+            <a:pPr lvl="0" marL="457200" indent="-228600">
+              <a:buFont typeface="Calibri"/>
               <a:spcAft>
                 <a:spcPts val="1000"/>
               </a:spcAft>
+              <a:buSzPct val="100000"/>
               <a:buChar char="•"/>
               <a:lnSpc>
                 <a:spcPts val="2200"/>
@@ -12929,10 +13007,12 @@
             </a:r>
           </a:p>
           <a:p>
-            <a:pPr>
+            <a:pPr lvl="0" marL="457200" indent="-228600">
+              <a:buFont typeface="Calibri"/>
               <a:spcAft>
                 <a:spcPts val="1000"/>
               </a:spcAft>
+              <a:buSzPct val="100000"/>
               <a:buChar char="•"/>
               <a:lnSpc>
                 <a:spcPts val="2200"/>
@@ -13068,10 +13148,12 @@
           </a:bodyPr>
           <a:lstStyle/>
           <a:p>
-            <a:pPr>
+            <a:pPr lvl="0" marL="457200" indent="-228600">
+              <a:buFont typeface="Calibri"/>
               <a:spcAft>
                 <a:spcPts val="1000"/>
               </a:spcAft>
+              <a:buSzPct val="100000"/>
               <a:buChar char="•"/>
               <a:lnSpc>
                 <a:spcPts val="2200"/>
@@ -13088,10 +13170,12 @@
             </a:r>
           </a:p>
           <a:p>
-            <a:pPr>
+            <a:pPr lvl="0" marL="457200" indent="-228600">
+              <a:buFont typeface="Calibri"/>
               <a:spcAft>
                 <a:spcPts val="1000"/>
               </a:spcAft>
+              <a:buSzPct val="100000"/>
               <a:buChar char="•"/>
               <a:lnSpc>
                 <a:spcPts val="2200"/>
@@ -13108,10 +13192,12 @@
             </a:r>
           </a:p>
           <a:p>
-            <a:pPr>
+            <a:pPr lvl="0" marL="457200" indent="-228600">
+              <a:buFont typeface="Calibri"/>
               <a:spcAft>
                 <a:spcPts val="1000"/>
               </a:spcAft>
+              <a:buSzPct val="100000"/>
               <a:buChar char="•"/>
               <a:lnSpc>
                 <a:spcPts val="2200"/>
@@ -13247,10 +13333,12 @@
           </a:bodyPr>
           <a:lstStyle/>
           <a:p>
-            <a:pPr>
+            <a:pPr lvl="0" marL="457200" indent="-228600">
+              <a:buFont typeface="Calibri"/>
               <a:spcAft>
                 <a:spcPts val="1000"/>
               </a:spcAft>
+              <a:buSzPct val="100000"/>
               <a:buChar char="•"/>
               <a:lnSpc>
                 <a:spcPts val="2200"/>
@@ -13267,10 +13355,12 @@
             </a:r>
           </a:p>
           <a:p>
-            <a:pPr>
+            <a:pPr lvl="0" marL="457200" indent="-228600">
+              <a:buFont typeface="Calibri"/>
               <a:spcAft>
                 <a:spcPts val="1000"/>
               </a:spcAft>
+              <a:buSzPct val="100000"/>
               <a:buChar char="•"/>
               <a:lnSpc>
                 <a:spcPts val="2200"/>
@@ -13287,10 +13377,12 @@
             </a:r>
           </a:p>
           <a:p>
-            <a:pPr>
+            <a:pPr lvl="0" marL="457200" indent="-228600">
+              <a:buFont typeface="Calibri"/>
               <a:spcAft>
                 <a:spcPts val="1000"/>
               </a:spcAft>
+              <a:buSzPct val="100000"/>
               <a:buChar char="•"/>
               <a:lnSpc>
                 <a:spcPts val="2200"/>
@@ -13426,10 +13518,12 @@
           </a:bodyPr>
           <a:lstStyle/>
           <a:p>
-            <a:pPr>
+            <a:pPr lvl="0" marL="457200" indent="-228600">
+              <a:buFont typeface="Calibri"/>
               <a:spcAft>
                 <a:spcPts val="1000"/>
               </a:spcAft>
+              <a:buSzPct val="100000"/>
               <a:buChar char="•"/>
               <a:lnSpc>
                 <a:spcPts val="2200"/>
@@ -13446,10 +13540,12 @@
             </a:r>
           </a:p>
           <a:p>
-            <a:pPr>
+            <a:pPr lvl="0" marL="457200" indent="-228600">
+              <a:buFont typeface="Calibri"/>
               <a:spcAft>
                 <a:spcPts val="1000"/>
               </a:spcAft>
+              <a:buSzPct val="100000"/>
               <a:buChar char="•"/>
               <a:lnSpc>
                 <a:spcPts val="2200"/>
@@ -13585,10 +13681,12 @@
           </a:bodyPr>
           <a:lstStyle/>
           <a:p>
-            <a:pPr>
+            <a:pPr lvl="0" marL="457200" indent="-228600">
+              <a:buFont typeface="Calibri"/>
               <a:spcAft>
                 <a:spcPts val="1000"/>
               </a:spcAft>
+              <a:buSzPct val="100000"/>
               <a:buChar char="•"/>
               <a:lnSpc>
                 <a:spcPts val="2200"/>
@@ -13724,10 +13822,12 @@
           </a:bodyPr>
           <a:lstStyle/>
           <a:p>
-            <a:pPr>
+            <a:pPr lvl="0" marL="457200" indent="-228600">
+              <a:buFont typeface="Calibri"/>
               <a:spcAft>
                 <a:spcPts val="1000"/>
               </a:spcAft>
+              <a:buSzPct val="100000"/>
               <a:buChar char="•"/>
               <a:lnSpc>
                 <a:spcPts val="2200"/>
@@ -13863,10 +13963,12 @@
           </a:bodyPr>
           <a:lstStyle/>
           <a:p>
-            <a:pPr>
+            <a:pPr lvl="0" marL="457200" indent="-228600">
+              <a:buFont typeface="Calibri"/>
               <a:spcAft>
                 <a:spcPts val="1000"/>
               </a:spcAft>
+              <a:buSzPct val="100000"/>
               <a:buChar char="•"/>
               <a:lnSpc>
                 <a:spcPts val="2200"/>
@@ -13883,10 +13985,12 @@
             </a:r>
           </a:p>
           <a:p>
-            <a:pPr>
+            <a:pPr lvl="0" marL="457200" indent="-228600">
+              <a:buFont typeface="Calibri"/>
               <a:spcAft>
                 <a:spcPts val="1000"/>
               </a:spcAft>
+              <a:buSzPct val="100000"/>
               <a:buChar char="•"/>
               <a:lnSpc>
                 <a:spcPts val="2200"/>
@@ -13903,10 +14007,12 @@
             </a:r>
           </a:p>
           <a:p>
-            <a:pPr>
+            <a:pPr lvl="0" marL="457200" indent="-228600">
+              <a:buFont typeface="Calibri"/>
               <a:spcAft>
                 <a:spcPts val="1000"/>
               </a:spcAft>
+              <a:buSzPct val="100000"/>
               <a:buChar char="•"/>
               <a:lnSpc>
                 <a:spcPts val="2200"/>
@@ -14042,10 +14148,12 @@
           </a:bodyPr>
           <a:lstStyle/>
           <a:p>
-            <a:pPr>
+            <a:pPr lvl="0" marL="457200" indent="-228600">
+              <a:buFont typeface="Calibri"/>
               <a:spcAft>
                 <a:spcPts val="1000"/>
               </a:spcAft>
+              <a:buSzPct val="100000"/>
               <a:buChar char="•"/>
               <a:lnSpc>
                 <a:spcPts val="2200"/>
@@ -14062,10 +14170,12 @@
             </a:r>
           </a:p>
           <a:p>
-            <a:pPr>
+            <a:pPr lvl="0" marL="457200" indent="-228600">
+              <a:buFont typeface="Calibri"/>
               <a:spcAft>
                 <a:spcPts val="1000"/>
               </a:spcAft>
+              <a:buSzPct val="100000"/>
               <a:buChar char="•"/>
               <a:lnSpc>
                 <a:spcPts val="2200"/>
@@ -14082,10 +14192,12 @@
             </a:r>
           </a:p>
           <a:p>
-            <a:pPr>
+            <a:pPr lvl="0" marL="457200" indent="-228600">
+              <a:buFont typeface="Calibri"/>
               <a:spcAft>
                 <a:spcPts val="1000"/>
               </a:spcAft>
+              <a:buSzPct val="100000"/>
               <a:buChar char="•"/>
               <a:lnSpc>
                 <a:spcPts val="2200"/>
@@ -14221,10 +14333,12 @@
           </a:bodyPr>
           <a:lstStyle/>
           <a:p>
-            <a:pPr>
+            <a:pPr lvl="0" marL="457200" indent="-228600">
+              <a:buFont typeface="Calibri"/>
               <a:spcAft>
                 <a:spcPts val="1000"/>
               </a:spcAft>
+              <a:buSzPct val="100000"/>
               <a:buChar char="•"/>
               <a:lnSpc>
                 <a:spcPts val="2200"/>
@@ -14241,10 +14355,12 @@
             </a:r>
           </a:p>
           <a:p>
-            <a:pPr>
+            <a:pPr lvl="0" marL="457200" indent="-228600">
+              <a:buFont typeface="Calibri"/>
               <a:spcAft>
                 <a:spcPts val="1000"/>
               </a:spcAft>
+              <a:buSzPct val="100000"/>
               <a:buChar char="•"/>
               <a:lnSpc>
                 <a:spcPts val="2200"/>
@@ -14261,10 +14377,12 @@
             </a:r>
           </a:p>
           <a:p>
-            <a:pPr>
+            <a:pPr lvl="0" marL="457200" indent="-228600">
+              <a:buFont typeface="Calibri"/>
               <a:spcAft>
                 <a:spcPts val="1000"/>
               </a:spcAft>
+              <a:buSzPct val="100000"/>
               <a:buChar char="•"/>
               <a:lnSpc>
                 <a:spcPts val="2200"/>
@@ -14281,10 +14399,12 @@
             </a:r>
           </a:p>
           <a:p>
-            <a:pPr>
+            <a:pPr lvl="0" marL="457200" indent="-228600">
+              <a:buFont typeface="Calibri"/>
               <a:spcAft>
                 <a:spcPts val="1000"/>
               </a:spcAft>
+              <a:buSzPct val="100000"/>
               <a:buChar char="•"/>
               <a:lnSpc>
                 <a:spcPts val="2200"/>
@@ -14301,10 +14421,12 @@
             </a:r>
           </a:p>
           <a:p>
-            <a:pPr>
+            <a:pPr lvl="0" marL="457200" indent="-228600">
+              <a:buFont typeface="Calibri"/>
               <a:spcAft>
                 <a:spcPts val="1000"/>
               </a:spcAft>
+              <a:buSzPct val="100000"/>
               <a:buChar char="•"/>
               <a:lnSpc>
                 <a:spcPts val="2200"/>
@@ -14903,10 +15025,12 @@
           </a:bodyPr>
           <a:lstStyle/>
           <a:p>
-            <a:pPr>
+            <a:pPr lvl="0" marL="457200" indent="-228600">
+              <a:buFont typeface="Calibri"/>
               <a:spcAft>
                 <a:spcPts val="1000"/>
               </a:spcAft>
+              <a:buSzPct val="100000"/>
               <a:buChar char="•"/>
               <a:lnSpc>
                 <a:spcPts val="2200"/>
@@ -14923,10 +15047,12 @@
             </a:r>
           </a:p>
           <a:p>
-            <a:pPr>
+            <a:pPr lvl="0" marL="457200" indent="-228600">
+              <a:buFont typeface="Calibri"/>
               <a:spcAft>
                 <a:spcPts val="1000"/>
               </a:spcAft>
+              <a:buSzPct val="100000"/>
               <a:buChar char="•"/>
               <a:lnSpc>
                 <a:spcPts val="2200"/>
@@ -14943,10 +15069,12 @@
             </a:r>
           </a:p>
           <a:p>
-            <a:pPr>
+            <a:pPr lvl="0" marL="457200" indent="-228600">
+              <a:buFont typeface="Calibri"/>
               <a:spcAft>
                 <a:spcPts val="1000"/>
               </a:spcAft>
+              <a:buSzPct val="100000"/>
               <a:buChar char="•"/>
               <a:lnSpc>
                 <a:spcPts val="2200"/>
@@ -15082,10 +15210,12 @@
           </a:bodyPr>
           <a:lstStyle/>
           <a:p>
-            <a:pPr>
+            <a:pPr lvl="0" marL="457200" indent="-228600">
+              <a:buFont typeface="Calibri"/>
               <a:spcAft>
                 <a:spcPts val="1000"/>
               </a:spcAft>
+              <a:buSzPct val="100000"/>
               <a:buChar char="•"/>
               <a:lnSpc>
                 <a:spcPts val="2200"/>
@@ -15102,10 +15232,12 @@
             </a:r>
           </a:p>
           <a:p>
-            <a:pPr>
+            <a:pPr lvl="0" marL="457200" indent="-228600">
+              <a:buFont typeface="Calibri"/>
               <a:spcAft>
                 <a:spcPts val="1000"/>
               </a:spcAft>
+              <a:buSzPct val="100000"/>
               <a:buChar char="•"/>
               <a:lnSpc>
                 <a:spcPts val="2200"/>
@@ -15122,10 +15254,12 @@
             </a:r>
           </a:p>
           <a:p>
-            <a:pPr>
+            <a:pPr lvl="0" marL="457200" indent="-228600">
+              <a:buFont typeface="Calibri"/>
               <a:spcAft>
                 <a:spcPts val="1000"/>
               </a:spcAft>
+              <a:buSzPct val="100000"/>
               <a:buChar char="•"/>
               <a:lnSpc>
                 <a:spcPts val="2200"/>
@@ -15142,10 +15276,12 @@
             </a:r>
           </a:p>
           <a:p>
-            <a:pPr>
+            <a:pPr lvl="0" marL="457200" indent="-228600">
+              <a:buFont typeface="Calibri"/>
               <a:spcAft>
                 <a:spcPts val="1000"/>
               </a:spcAft>
+              <a:buSzPct val="100000"/>
               <a:buChar char="•"/>
               <a:lnSpc>
                 <a:spcPts val="2200"/>
@@ -15162,10 +15298,12 @@
             </a:r>
           </a:p>
           <a:p>
-            <a:pPr>
+            <a:pPr lvl="0" marL="457200" indent="-228600">
+              <a:buFont typeface="Calibri"/>
               <a:spcAft>
                 <a:spcPts val="1000"/>
               </a:spcAft>
+              <a:buSzPct val="100000"/>
               <a:buChar char="•"/>
               <a:lnSpc>
                 <a:spcPts val="2200"/>
@@ -15764,10 +15902,12 @@
           </a:bodyPr>
           <a:lstStyle/>
           <a:p>
-            <a:pPr>
+            <a:pPr lvl="0" marL="457200" indent="-228600">
+              <a:buFont typeface="Calibri"/>
               <a:spcAft>
                 <a:spcPts val="1000"/>
               </a:spcAft>
+              <a:buSzPct val="100000"/>
               <a:buChar char="•"/>
               <a:lnSpc>
                 <a:spcPts val="2200"/>
@@ -15784,10 +15924,12 @@
             </a:r>
           </a:p>
           <a:p>
-            <a:pPr>
+            <a:pPr lvl="0" marL="457200" indent="-228600">
+              <a:buFont typeface="Calibri"/>
               <a:spcAft>
                 <a:spcPts val="1000"/>
               </a:spcAft>
+              <a:buSzPct val="100000"/>
               <a:buChar char="•"/>
               <a:lnSpc>
                 <a:spcPts val="2200"/>
@@ -15804,10 +15946,12 @@
             </a:r>
           </a:p>
           <a:p>
-            <a:pPr>
+            <a:pPr lvl="0" marL="457200" indent="-228600">
+              <a:buFont typeface="Calibri"/>
               <a:spcAft>
                 <a:spcPts val="1000"/>
               </a:spcAft>
+              <a:buSzPct val="100000"/>
               <a:buChar char="•"/>
               <a:lnSpc>
                 <a:spcPts val="2200"/>
@@ -15943,10 +16087,12 @@
           </a:bodyPr>
           <a:lstStyle/>
           <a:p>
-            <a:pPr>
+            <a:pPr lvl="0" marL="457200" indent="-228600">
+              <a:buFont typeface="Calibri"/>
               <a:spcAft>
                 <a:spcPts val="1000"/>
               </a:spcAft>
+              <a:buSzPct val="100000"/>
               <a:buChar char="•"/>
               <a:lnSpc>
                 <a:spcPts val="2200"/>
@@ -15963,10 +16109,12 @@
             </a:r>
           </a:p>
           <a:p>
-            <a:pPr>
+            <a:pPr lvl="0" marL="457200" indent="-228600">
+              <a:buFont typeface="Calibri"/>
               <a:spcAft>
                 <a:spcPts val="1000"/>
               </a:spcAft>
+              <a:buSzPct val="100000"/>
               <a:buChar char="•"/>
               <a:lnSpc>
                 <a:spcPts val="2200"/>
@@ -15983,10 +16131,12 @@
             </a:r>
           </a:p>
           <a:p>
-            <a:pPr>
+            <a:pPr lvl="0" marL="457200" indent="-228600">
+              <a:buFont typeface="Calibri"/>
               <a:spcAft>
                 <a:spcPts val="1000"/>
               </a:spcAft>
+              <a:buSzPct val="100000"/>
               <a:buChar char="•"/>
               <a:lnSpc>
                 <a:spcPts val="2200"/>
@@ -16122,10 +16272,12 @@
           </a:bodyPr>
           <a:lstStyle/>
           <a:p>
-            <a:pPr>
+            <a:pPr lvl="0" marL="457200" indent="-228600">
+              <a:buFont typeface="Calibri"/>
               <a:spcAft>
                 <a:spcPts val="1000"/>
               </a:spcAft>
+              <a:buSzPct val="100000"/>
               <a:buChar char="•"/>
               <a:lnSpc>
                 <a:spcPts val="2200"/>
@@ -16142,10 +16294,12 @@
             </a:r>
           </a:p>
           <a:p>
-            <a:pPr>
+            <a:pPr lvl="0" marL="457200" indent="-228600">
+              <a:buFont typeface="Calibri"/>
               <a:spcAft>
                 <a:spcPts val="1000"/>
               </a:spcAft>
+              <a:buSzPct val="100000"/>
               <a:buChar char="•"/>
               <a:lnSpc>
                 <a:spcPts val="2200"/>
@@ -16162,10 +16316,12 @@
             </a:r>
           </a:p>
           <a:p>
-            <a:pPr>
+            <a:pPr lvl="0" marL="457200" indent="-228600">
+              <a:buFont typeface="Calibri"/>
               <a:spcAft>
                 <a:spcPts val="1000"/>
               </a:spcAft>
+              <a:buSzPct val="100000"/>
               <a:buChar char="•"/>
               <a:lnSpc>
                 <a:spcPts val="2200"/>
@@ -16301,10 +16457,12 @@
           </a:bodyPr>
           <a:lstStyle/>
           <a:p>
-            <a:pPr>
+            <a:pPr lvl="0" marL="457200" indent="-228600">
+              <a:buFont typeface="Calibri"/>
               <a:spcAft>
                 <a:spcPts val="1000"/>
               </a:spcAft>
+              <a:buSzPct val="100000"/>
               <a:buChar char="•"/>
               <a:lnSpc>
                 <a:spcPts val="2200"/>
@@ -16321,10 +16479,12 @@
             </a:r>
           </a:p>
           <a:p>
-            <a:pPr>
+            <a:pPr lvl="0" marL="457200" indent="-228600">
+              <a:buFont typeface="Calibri"/>
               <a:spcAft>
                 <a:spcPts val="1000"/>
               </a:spcAft>
+              <a:buSzPct val="100000"/>
               <a:buChar char="•"/>
               <a:lnSpc>
                 <a:spcPts val="2200"/>
@@ -16460,10 +16620,12 @@
           </a:bodyPr>
           <a:lstStyle/>
           <a:p>
-            <a:pPr>
+            <a:pPr lvl="0" marL="457200" indent="-228600">
+              <a:buFont typeface="Calibri"/>
               <a:spcAft>
                 <a:spcPts val="1000"/>
               </a:spcAft>
+              <a:buSzPct val="100000"/>
               <a:buChar char="•"/>
               <a:lnSpc>
                 <a:spcPts val="2200"/>
@@ -16599,10 +16761,12 @@
           </a:bodyPr>
           <a:lstStyle/>
           <a:p>
-            <a:pPr>
+            <a:pPr lvl="0" marL="457200" indent="-228600">
+              <a:buFont typeface="Calibri"/>
               <a:spcAft>
                 <a:spcPts val="1000"/>
               </a:spcAft>
+              <a:buSzPct val="100000"/>
               <a:buChar char="•"/>
               <a:lnSpc>
                 <a:spcPts val="2200"/>
@@ -16619,10 +16783,12 @@
             </a:r>
           </a:p>
           <a:p>
-            <a:pPr>
+            <a:pPr lvl="0" marL="457200" indent="-228600">
+              <a:buFont typeface="Calibri"/>
               <a:spcAft>
                 <a:spcPts val="1000"/>
               </a:spcAft>
+              <a:buSzPct val="100000"/>
               <a:buChar char="•"/>
               <a:lnSpc>
                 <a:spcPts val="2200"/>
@@ -16639,10 +16805,12 @@
             </a:r>
           </a:p>
           <a:p>
-            <a:pPr>
+            <a:pPr lvl="0" marL="457200" indent="-228600">
+              <a:buFont typeface="Calibri"/>
               <a:spcAft>
                 <a:spcPts val="1000"/>
               </a:spcAft>
+              <a:buSzPct val="100000"/>
               <a:buChar char="•"/>
               <a:lnSpc>
                 <a:spcPts val="2200"/>
@@ -16659,10 +16827,12 @@
             </a:r>
           </a:p>
           <a:p>
-            <a:pPr>
+            <a:pPr lvl="0" marL="457200" indent="-228600">
+              <a:buFont typeface="Calibri"/>
               <a:spcAft>
                 <a:spcPts val="1000"/>
               </a:spcAft>
+              <a:buSzPct val="100000"/>
               <a:buChar char="•"/>
               <a:lnSpc>
                 <a:spcPts val="2200"/>
@@ -16798,10 +16968,12 @@
           </a:bodyPr>
           <a:lstStyle/>
           <a:p>
-            <a:pPr>
+            <a:pPr lvl="0" marL="457200" indent="-228600">
+              <a:buFont typeface="Calibri"/>
               <a:spcAft>
                 <a:spcPts val="1000"/>
               </a:spcAft>
+              <a:buSzPct val="100000"/>
               <a:buChar char="•"/>
               <a:lnSpc>
                 <a:spcPts val="2200"/>
@@ -16818,10 +16990,12 @@
             </a:r>
           </a:p>
           <a:p>
-            <a:pPr>
+            <a:pPr lvl="0" marL="457200" indent="-228600">
+              <a:buFont typeface="Calibri"/>
               <a:spcAft>
                 <a:spcPts val="1000"/>
               </a:spcAft>
+              <a:buSzPct val="100000"/>
               <a:buChar char="•"/>
               <a:lnSpc>
                 <a:spcPts val="2200"/>
@@ -16838,10 +17012,12 @@
             </a:r>
           </a:p>
           <a:p>
-            <a:pPr>
+            <a:pPr lvl="0" marL="457200" indent="-228600">
+              <a:buFont typeface="Calibri"/>
               <a:spcAft>
                 <a:spcPts val="1000"/>
               </a:spcAft>
+              <a:buSzPct val="100000"/>
               <a:buChar char="•"/>
               <a:lnSpc>
                 <a:spcPts val="2200"/>
@@ -16858,10 +17034,12 @@
             </a:r>
           </a:p>
           <a:p>
-            <a:pPr>
+            <a:pPr lvl="0" marL="457200" indent="-228600">
+              <a:buFont typeface="Calibri"/>
               <a:spcAft>
                 <a:spcPts val="1000"/>
               </a:spcAft>
+              <a:buSzPct val="100000"/>
               <a:buChar char="•"/>
               <a:lnSpc>
                 <a:spcPts val="2200"/>
@@ -16878,10 +17056,12 @@
             </a:r>
           </a:p>
           <a:p>
-            <a:pPr>
+            <a:pPr lvl="0" marL="457200" indent="-228600">
+              <a:buFont typeface="Calibri"/>
               <a:spcAft>
                 <a:spcPts val="1000"/>
               </a:spcAft>
+              <a:buSzPct val="100000"/>
               <a:buChar char="•"/>
               <a:lnSpc>
                 <a:spcPts val="2200"/>
@@ -17480,10 +17660,12 @@
           </a:bodyPr>
           <a:lstStyle/>
           <a:p>
-            <a:pPr>
+            <a:pPr lvl="0" marL="457200" indent="-228600">
+              <a:buFont typeface="Calibri"/>
               <a:spcAft>
                 <a:spcPts val="1000"/>
               </a:spcAft>
+              <a:buSzPct val="100000"/>
               <a:buChar char="•"/>
               <a:lnSpc>
                 <a:spcPts val="2200"/>
@@ -17500,10 +17682,12 @@
             </a:r>
           </a:p>
           <a:p>
-            <a:pPr>
+            <a:pPr lvl="0" marL="457200" indent="-228600">
+              <a:buFont typeface="Calibri"/>
               <a:spcAft>
                 <a:spcPts val="1000"/>
               </a:spcAft>
+              <a:buSzPct val="100000"/>
               <a:buChar char="•"/>
               <a:lnSpc>
                 <a:spcPts val="2200"/>
@@ -17639,10 +17823,12 @@
           </a:bodyPr>
           <a:lstStyle/>
           <a:p>
-            <a:pPr>
+            <a:pPr lvl="0" marL="457200" indent="-228600">
+              <a:buFont typeface="Calibri"/>
               <a:spcAft>
                 <a:spcPts val="1000"/>
               </a:spcAft>
+              <a:buSzPct val="100000"/>
               <a:buChar char="•"/>
               <a:lnSpc>
                 <a:spcPts val="2200"/>
@@ -17659,10 +17845,12 @@
             </a:r>
           </a:p>
           <a:p>
-            <a:pPr>
+            <a:pPr lvl="0" marL="457200" indent="-228600">
+              <a:buFont typeface="Calibri"/>
               <a:spcAft>
                 <a:spcPts val="1000"/>
               </a:spcAft>
+              <a:buSzPct val="100000"/>
               <a:buChar char="•"/>
               <a:lnSpc>
                 <a:spcPts val="2200"/>
@@ -17679,10 +17867,12 @@
             </a:r>
           </a:p>
           <a:p>
-            <a:pPr>
+            <a:pPr lvl="0" marL="457200" indent="-228600">
+              <a:buFont typeface="Calibri"/>
               <a:spcAft>
                 <a:spcPts val="1000"/>
               </a:spcAft>
+              <a:buSzPct val="100000"/>
               <a:buChar char="•"/>
               <a:lnSpc>
                 <a:spcPts val="2200"/>
@@ -17818,10 +18008,12 @@
           </a:bodyPr>
           <a:lstStyle/>
           <a:p>
-            <a:pPr>
+            <a:pPr lvl="0" marL="457200" indent="-228600">
+              <a:buFont typeface="Calibri"/>
               <a:spcAft>
                 <a:spcPts val="1000"/>
               </a:spcAft>
+              <a:buSzPct val="100000"/>
               <a:buChar char="•"/>
               <a:lnSpc>
                 <a:spcPts val="2200"/>
@@ -17838,10 +18030,12 @@
             </a:r>
           </a:p>
           <a:p>
-            <a:pPr>
+            <a:pPr lvl="0" marL="457200" indent="-228600">
+              <a:buFont typeface="Calibri"/>
               <a:spcAft>
                 <a:spcPts val="1000"/>
               </a:spcAft>
+              <a:buSzPct val="100000"/>
               <a:buChar char="•"/>
               <a:lnSpc>
                 <a:spcPts val="2200"/>
@@ -17858,10 +18052,12 @@
             </a:r>
           </a:p>
           <a:p>
-            <a:pPr>
+            <a:pPr lvl="0" marL="457200" indent="-228600">
+              <a:buFont typeface="Calibri"/>
               <a:spcAft>
                 <a:spcPts val="1000"/>
               </a:spcAft>
+              <a:buSzPct val="100000"/>
               <a:buChar char="•"/>
               <a:lnSpc>
                 <a:spcPts val="2200"/>
@@ -17878,10 +18074,12 @@
             </a:r>
           </a:p>
           <a:p>
-            <a:pPr>
+            <a:pPr lvl="0" marL="457200" indent="-228600">
+              <a:buFont typeface="Calibri"/>
               <a:spcAft>
                 <a:spcPts val="1000"/>
               </a:spcAft>
+              <a:buSzPct val="100000"/>
               <a:buChar char="•"/>
               <a:lnSpc>
                 <a:spcPts val="2200"/>
@@ -17898,10 +18096,12 @@
             </a:r>
           </a:p>
           <a:p>
-            <a:pPr>
+            <a:pPr lvl="0" marL="457200" indent="-228600">
+              <a:buFont typeface="Calibri"/>
               <a:spcAft>
                 <a:spcPts val="1000"/>
               </a:spcAft>
+              <a:buSzPct val="100000"/>
               <a:buChar char="•"/>
               <a:lnSpc>
                 <a:spcPts val="2200"/>
@@ -18500,10 +18700,12 @@
           </a:bodyPr>
           <a:lstStyle/>
           <a:p>
-            <a:pPr>
+            <a:pPr lvl="0" marL="457200" indent="-228600">
+              <a:buFont typeface="Calibri"/>
               <a:spcAft>
                 <a:spcPts val="1000"/>
               </a:spcAft>
+              <a:buSzPct val="100000"/>
               <a:buChar char="•"/>
               <a:lnSpc>
                 <a:spcPts val="2200"/>
@@ -18520,10 +18722,12 @@
             </a:r>
           </a:p>
           <a:p>
-            <a:pPr>
+            <a:pPr lvl="0" marL="457200" indent="-228600">
+              <a:buFont typeface="Calibri"/>
               <a:spcAft>
                 <a:spcPts val="1000"/>
               </a:spcAft>
+              <a:buSzPct val="100000"/>
               <a:buChar char="•"/>
               <a:lnSpc>
                 <a:spcPts val="2200"/>
@@ -18659,10 +18863,12 @@
           </a:bodyPr>
           <a:lstStyle/>
           <a:p>
-            <a:pPr>
+            <a:pPr lvl="0" marL="457200" indent="-228600">
+              <a:buFont typeface="Calibri"/>
               <a:spcAft>
                 <a:spcPts val="1000"/>
               </a:spcAft>
+              <a:buSzPct val="100000"/>
               <a:buChar char="•"/>
               <a:lnSpc>
                 <a:spcPts val="2200"/>
@@ -18679,10 +18885,12 @@
             </a:r>
           </a:p>
           <a:p>
-            <a:pPr>
+            <a:pPr lvl="0" marL="457200" indent="-228600">
+              <a:buFont typeface="Calibri"/>
               <a:spcAft>
                 <a:spcPts val="1000"/>
               </a:spcAft>
+              <a:buSzPct val="100000"/>
               <a:buChar char="•"/>
               <a:lnSpc>
                 <a:spcPts val="2200"/>
@@ -18699,10 +18907,12 @@
             </a:r>
           </a:p>
           <a:p>
-            <a:pPr>
+            <a:pPr lvl="0" marL="457200" indent="-228600">
+              <a:buFont typeface="Calibri"/>
               <a:spcAft>
                 <a:spcPts val="1000"/>
               </a:spcAft>
+              <a:buSzPct val="100000"/>
               <a:buChar char="•"/>
               <a:lnSpc>
                 <a:spcPts val="2200"/>
@@ -18719,10 +18929,12 @@
             </a:r>
           </a:p>
           <a:p>
-            <a:pPr>
+            <a:pPr lvl="0" marL="457200" indent="-228600">
+              <a:buFont typeface="Calibri"/>
               <a:spcAft>
                 <a:spcPts val="1000"/>
               </a:spcAft>
+              <a:buSzPct val="100000"/>
               <a:buChar char="•"/>
               <a:lnSpc>
                 <a:spcPts val="2200"/>
@@ -18739,10 +18951,12 @@
             </a:r>
           </a:p>
           <a:p>
-            <a:pPr>
+            <a:pPr lvl="0" marL="457200" indent="-228600">
+              <a:buFont typeface="Calibri"/>
               <a:spcAft>
                 <a:spcPts val="1000"/>
               </a:spcAft>
+              <a:buSzPct val="100000"/>
               <a:buChar char="•"/>
               <a:lnSpc>
                 <a:spcPts val="2200"/>
@@ -18759,10 +18973,12 @@
             </a:r>
           </a:p>
           <a:p>
-            <a:pPr>
+            <a:pPr lvl="0" marL="457200" indent="-228600">
+              <a:buFont typeface="Calibri"/>
               <a:spcAft>
                 <a:spcPts val="1000"/>
               </a:spcAft>
+              <a:buSzPct val="100000"/>
               <a:buChar char="•"/>
               <a:lnSpc>
                 <a:spcPts val="2200"/>
@@ -18898,10 +19114,12 @@
           </a:bodyPr>
           <a:lstStyle/>
           <a:p>
-            <a:pPr>
+            <a:pPr lvl="0" marL="457200" indent="-228600">
+              <a:buFont typeface="Calibri"/>
               <a:spcAft>
                 <a:spcPts val="1000"/>
               </a:spcAft>
+              <a:buSzPct val="100000"/>
               <a:buChar char="•"/>
               <a:lnSpc>
                 <a:spcPts val="2200"/>
@@ -18918,10 +19136,12 @@
             </a:r>
           </a:p>
           <a:p>
-            <a:pPr>
+            <a:pPr lvl="0" marL="457200" indent="-228600">
+              <a:buFont typeface="Calibri"/>
               <a:spcAft>
                 <a:spcPts val="1000"/>
               </a:spcAft>
+              <a:buSzPct val="100000"/>
               <a:buChar char="•"/>
               <a:lnSpc>
                 <a:spcPts val="2200"/>
@@ -18938,10 +19158,12 @@
             </a:r>
           </a:p>
           <a:p>
-            <a:pPr>
+            <a:pPr lvl="0" marL="457200" indent="-228600">
+              <a:buFont typeface="Calibri"/>
               <a:spcAft>
                 <a:spcPts val="1000"/>
               </a:spcAft>
+              <a:buSzPct val="100000"/>
               <a:buChar char="•"/>
               <a:lnSpc>
                 <a:spcPts val="2200"/>
@@ -18958,10 +19180,12 @@
             </a:r>
           </a:p>
           <a:p>
-            <a:pPr>
+            <a:pPr lvl="0" marL="457200" indent="-228600">
+              <a:buFont typeface="Calibri"/>
               <a:spcAft>
                 <a:spcPts val="1000"/>
               </a:spcAft>
+              <a:buSzPct val="100000"/>
               <a:buChar char="•"/>
               <a:lnSpc>
                 <a:spcPts val="2200"/>
@@ -18978,10 +19202,12 @@
             </a:r>
           </a:p>
           <a:p>
-            <a:pPr>
+            <a:pPr lvl="0" marL="457200" indent="-228600">
+              <a:buFont typeface="Calibri"/>
               <a:spcAft>
                 <a:spcPts val="1000"/>
               </a:spcAft>
+              <a:buSzPct val="100000"/>
               <a:buChar char="•"/>
               <a:lnSpc>
                 <a:spcPts val="2200"/>
@@ -19580,10 +19806,12 @@
           </a:bodyPr>
           <a:lstStyle/>
           <a:p>
-            <a:pPr>
+            <a:pPr lvl="0" marL="457200" indent="-228600">
+              <a:buFont typeface="Calibri"/>
               <a:spcAft>
                 <a:spcPts val="1000"/>
               </a:spcAft>
+              <a:buSzPct val="100000"/>
               <a:buChar char="•"/>
               <a:lnSpc>
                 <a:spcPts val="2200"/>
@@ -19600,10 +19828,12 @@
             </a:r>
           </a:p>
           <a:p>
-            <a:pPr>
+            <a:pPr lvl="0" marL="457200" indent="-228600">
+              <a:buFont typeface="Calibri"/>
               <a:spcAft>
                 <a:spcPts val="1000"/>
               </a:spcAft>
+              <a:buSzPct val="100000"/>
               <a:buChar char="•"/>
               <a:lnSpc>
                 <a:spcPts val="2200"/>
@@ -19620,10 +19850,12 @@
             </a:r>
           </a:p>
           <a:p>
-            <a:pPr>
+            <a:pPr lvl="0" marL="457200" indent="-228600">
+              <a:buFont typeface="Calibri"/>
               <a:spcAft>
                 <a:spcPts val="1000"/>
               </a:spcAft>
+              <a:buSzPct val="100000"/>
               <a:buChar char="•"/>
               <a:lnSpc>
                 <a:spcPts val="2200"/>
@@ -19759,10 +19991,12 @@
           </a:bodyPr>
           <a:lstStyle/>
           <a:p>
-            <a:pPr>
+            <a:pPr lvl="0" marL="457200" indent="-228600">
+              <a:buFont typeface="Calibri"/>
               <a:spcAft>
                 <a:spcPts val="1000"/>
               </a:spcAft>
+              <a:buSzPct val="100000"/>
               <a:buChar char="•"/>
               <a:lnSpc>
                 <a:spcPts val="2200"/>
@@ -19779,10 +20013,12 @@
             </a:r>
           </a:p>
           <a:p>
-            <a:pPr>
+            <a:pPr lvl="0" marL="457200" indent="-228600">
+              <a:buFont typeface="Calibri"/>
               <a:spcAft>
                 <a:spcPts val="1000"/>
               </a:spcAft>
+              <a:buSzPct val="100000"/>
               <a:buChar char="•"/>
               <a:lnSpc>
                 <a:spcPts val="2200"/>
@@ -19918,10 +20154,12 @@
           </a:bodyPr>
           <a:lstStyle/>
           <a:p>
-            <a:pPr>
+            <a:pPr lvl="0" marL="457200" indent="-228600">
+              <a:buFont typeface="Calibri"/>
               <a:spcAft>
                 <a:spcPts val="1000"/>
               </a:spcAft>
+              <a:buSzPct val="100000"/>
               <a:buChar char="•"/>
               <a:lnSpc>
                 <a:spcPts val="2200"/>
@@ -20057,10 +20295,12 @@
           </a:bodyPr>
           <a:lstStyle/>
           <a:p>
-            <a:pPr>
+            <a:pPr lvl="0" marL="457200" indent="-228600">
+              <a:buFont typeface="Calibri"/>
               <a:spcAft>
                 <a:spcPts val="1000"/>
               </a:spcAft>
+              <a:buSzPct val="100000"/>
               <a:buChar char="•"/>
               <a:lnSpc>
                 <a:spcPts val="2200"/>
@@ -20077,10 +20317,12 @@
             </a:r>
           </a:p>
           <a:p>
-            <a:pPr>
+            <a:pPr lvl="0" marL="457200" indent="-228600">
+              <a:buFont typeface="Calibri"/>
               <a:spcAft>
                 <a:spcPts val="1000"/>
               </a:spcAft>
+              <a:buSzPct val="100000"/>
               <a:buChar char="•"/>
               <a:lnSpc>
                 <a:spcPts val="2200"/>
@@ -20097,10 +20339,12 @@
             </a:r>
           </a:p>
           <a:p>
-            <a:pPr>
+            <a:pPr lvl="0" marL="457200" indent="-228600">
+              <a:buFont typeface="Calibri"/>
               <a:spcAft>
                 <a:spcPts val="1000"/>
               </a:spcAft>
+              <a:buSzPct val="100000"/>
               <a:buChar char="•"/>
               <a:lnSpc>
                 <a:spcPts val="2200"/>
@@ -20236,10 +20480,12 @@
           </a:bodyPr>
           <a:lstStyle/>
           <a:p>
-            <a:pPr>
+            <a:pPr lvl="0" marL="457200" indent="-228600">
+              <a:buFont typeface="Calibri"/>
               <a:spcAft>
                 <a:spcPts val="1000"/>
               </a:spcAft>
+              <a:buSzPct val="100000"/>
               <a:buChar char="•"/>
               <a:lnSpc>
                 <a:spcPts val="2200"/>
@@ -20256,10 +20502,12 @@
             </a:r>
           </a:p>
           <a:p>
-            <a:pPr>
+            <a:pPr lvl="0" marL="457200" indent="-228600">
+              <a:buFont typeface="Calibri"/>
               <a:spcAft>
                 <a:spcPts val="1000"/>
               </a:spcAft>
+              <a:buSzPct val="100000"/>
               <a:buChar char="•"/>
               <a:lnSpc>
                 <a:spcPts val="2200"/>
@@ -20276,10 +20524,12 @@
             </a:r>
           </a:p>
           <a:p>
-            <a:pPr>
+            <a:pPr lvl="0" marL="457200" indent="-228600">
+              <a:buFont typeface="Calibri"/>
               <a:spcAft>
                 <a:spcPts val="1000"/>
               </a:spcAft>
+              <a:buSzPct val="100000"/>
               <a:buChar char="•"/>
               <a:lnSpc>
                 <a:spcPts val="2200"/>
@@ -20415,10 +20665,12 @@
           </a:bodyPr>
           <a:lstStyle/>
           <a:p>
-            <a:pPr>
+            <a:pPr lvl="0" marL="457200" indent="-228600">
+              <a:buFont typeface="Calibri"/>
               <a:spcAft>
                 <a:spcPts val="1000"/>
               </a:spcAft>
+              <a:buSzPct val="100000"/>
               <a:buChar char="•"/>
               <a:lnSpc>
                 <a:spcPts val="2200"/>
@@ -20435,10 +20687,12 @@
             </a:r>
           </a:p>
           <a:p>
-            <a:pPr>
+            <a:pPr lvl="0" marL="457200" indent="-228600">
+              <a:buFont typeface="Calibri"/>
               <a:spcAft>
                 <a:spcPts val="1000"/>
               </a:spcAft>
+              <a:buSzPct val="100000"/>
               <a:buChar char="•"/>
               <a:lnSpc>
                 <a:spcPts val="2200"/>
@@ -20455,10 +20709,12 @@
             </a:r>
           </a:p>
           <a:p>
-            <a:pPr>
+            <a:pPr lvl="0" marL="457200" indent="-228600">
+              <a:buFont typeface="Calibri"/>
               <a:spcAft>
                 <a:spcPts val="1000"/>
               </a:spcAft>
+              <a:buSzPct val="100000"/>
               <a:buChar char="•"/>
               <a:lnSpc>
                 <a:spcPts val="2200"/>
@@ -20594,10 +20850,12 @@
           </a:bodyPr>
           <a:lstStyle/>
           <a:p>
-            <a:pPr>
+            <a:pPr lvl="0" marL="457200" indent="-228600">
+              <a:buFont typeface="Calibri"/>
               <a:spcAft>
                 <a:spcPts val="1000"/>
               </a:spcAft>
+              <a:buSzPct val="100000"/>
               <a:buChar char="•"/>
               <a:lnSpc>
                 <a:spcPts val="2200"/>
@@ -20614,10 +20872,12 @@
             </a:r>
           </a:p>
           <a:p>
-            <a:pPr>
+            <a:pPr lvl="0" marL="457200" indent="-228600">
+              <a:buFont typeface="Calibri"/>
               <a:spcAft>
                 <a:spcPts val="1000"/>
               </a:spcAft>
+              <a:buSzPct val="100000"/>
               <a:buChar char="•"/>
               <a:lnSpc>
                 <a:spcPts val="2200"/>
@@ -20634,10 +20894,12 @@
             </a:r>
           </a:p>
           <a:p>
-            <a:pPr>
+            <a:pPr lvl="0" marL="457200" indent="-228600">
+              <a:buFont typeface="Calibri"/>
               <a:spcAft>
                 <a:spcPts val="1000"/>
               </a:spcAft>
+              <a:buSzPct val="100000"/>
               <a:buChar char="•"/>
               <a:lnSpc>
                 <a:spcPts val="2200"/>
@@ -20654,10 +20916,12 @@
             </a:r>
           </a:p>
           <a:p>
-            <a:pPr>
+            <a:pPr lvl="0" marL="457200" indent="-228600">
+              <a:buFont typeface="Calibri"/>
               <a:spcAft>
                 <a:spcPts val="1000"/>
               </a:spcAft>
+              <a:buSzPct val="100000"/>
               <a:buChar char="•"/>
               <a:lnSpc>
                 <a:spcPts val="2200"/>
@@ -20793,10 +21057,12 @@
           </a:bodyPr>
           <a:lstStyle/>
           <a:p>
-            <a:pPr>
+            <a:pPr lvl="0" marL="457200" indent="-228600">
+              <a:buFont typeface="Calibri"/>
               <a:spcAft>
                 <a:spcPts val="1000"/>
               </a:spcAft>
+              <a:buSzPct val="100000"/>
               <a:buChar char="•"/>
               <a:lnSpc>
                 <a:spcPts val="2200"/>
@@ -20813,10 +21079,12 @@
             </a:r>
           </a:p>
           <a:p>
-            <a:pPr>
+            <a:pPr lvl="0" marL="457200" indent="-228600">
+              <a:buFont typeface="Calibri"/>
               <a:spcAft>
                 <a:spcPts val="1000"/>
               </a:spcAft>
+              <a:buSzPct val="100000"/>
               <a:buChar char="•"/>
               <a:lnSpc>
                 <a:spcPts val="2200"/>
@@ -20833,10 +21101,12 @@
             </a:r>
           </a:p>
           <a:p>
-            <a:pPr>
+            <a:pPr lvl="0" marL="457200" indent="-228600">
+              <a:buFont typeface="Calibri"/>
               <a:spcAft>
                 <a:spcPts val="1000"/>
               </a:spcAft>
+              <a:buSzPct val="100000"/>
               <a:buChar char="•"/>
               <a:lnSpc>
                 <a:spcPts val="2200"/>
@@ -20853,10 +21123,12 @@
             </a:r>
           </a:p>
           <a:p>
-            <a:pPr>
+            <a:pPr lvl="0" marL="457200" indent="-228600">
+              <a:buFont typeface="Calibri"/>
               <a:spcAft>
                 <a:spcPts val="1000"/>
               </a:spcAft>
+              <a:buSzPct val="100000"/>
               <a:buChar char="•"/>
               <a:lnSpc>
                 <a:spcPts val="2200"/>
@@ -20992,10 +21264,12 @@
           </a:bodyPr>
           <a:lstStyle/>
           <a:p>
-            <a:pPr>
+            <a:pPr lvl="0" marL="457200" indent="-228600">
+              <a:buFont typeface="Calibri"/>
               <a:spcAft>
                 <a:spcPts val="1000"/>
               </a:spcAft>
+              <a:buSzPct val="100000"/>
               <a:buChar char="•"/>
               <a:lnSpc>
                 <a:spcPts val="2200"/>
@@ -21012,10 +21286,12 @@
             </a:r>
           </a:p>
           <a:p>
-            <a:pPr>
+            <a:pPr lvl="0" marL="457200" indent="-228600">
+              <a:buFont typeface="Calibri"/>
               <a:spcAft>
                 <a:spcPts val="1000"/>
               </a:spcAft>
+              <a:buSzPct val="100000"/>
               <a:buChar char="•"/>
               <a:lnSpc>
                 <a:spcPts val="2200"/>
@@ -21032,10 +21308,12 @@
             </a:r>
           </a:p>
           <a:p>
-            <a:pPr>
+            <a:pPr lvl="0" marL="457200" indent="-228600">
+              <a:buFont typeface="Calibri"/>
               <a:spcAft>
                 <a:spcPts val="1000"/>
               </a:spcAft>
+              <a:buSzPct val="100000"/>
               <a:buChar char="•"/>
               <a:lnSpc>
                 <a:spcPts val="2200"/>
@@ -21052,10 +21330,12 @@
             </a:r>
           </a:p>
           <a:p>
-            <a:pPr>
+            <a:pPr lvl="0" marL="457200" indent="-228600">
+              <a:buFont typeface="Calibri"/>
               <a:spcAft>
                 <a:spcPts val="1000"/>
               </a:spcAft>
+              <a:buSzPct val="100000"/>
               <a:buChar char="•"/>
               <a:lnSpc>
                 <a:spcPts val="2200"/>
@@ -21191,10 +21471,12 @@
           </a:bodyPr>
           <a:lstStyle/>
           <a:p>
-            <a:pPr>
+            <a:pPr lvl="0" marL="457200" indent="-228600">
+              <a:buFont typeface="Calibri"/>
               <a:spcAft>
                 <a:spcPts val="1000"/>
               </a:spcAft>
+              <a:buSzPct val="100000"/>
               <a:buChar char="•"/>
               <a:lnSpc>
                 <a:spcPts val="2200"/>
@@ -21211,10 +21493,12 @@
             </a:r>
           </a:p>
           <a:p>
-            <a:pPr>
+            <a:pPr lvl="0" marL="457200" indent="-228600">
+              <a:buFont typeface="Calibri"/>
               <a:spcAft>
                 <a:spcPts val="1000"/>
               </a:spcAft>
+              <a:buSzPct val="100000"/>
               <a:buChar char="•"/>
               <a:lnSpc>
                 <a:spcPts val="2200"/>
@@ -21231,10 +21515,12 @@
             </a:r>
           </a:p>
           <a:p>
-            <a:pPr>
+            <a:pPr lvl="0" marL="457200" indent="-228600">
+              <a:buFont typeface="Calibri"/>
               <a:spcAft>
                 <a:spcPts val="1000"/>
               </a:spcAft>
+              <a:buSzPct val="100000"/>
               <a:buChar char="•"/>
               <a:lnSpc>
                 <a:spcPts val="2200"/>
@@ -21251,10 +21537,12 @@
             </a:r>
           </a:p>
           <a:p>
-            <a:pPr>
+            <a:pPr lvl="0" marL="457200" indent="-228600">
+              <a:buFont typeface="Calibri"/>
               <a:spcAft>
                 <a:spcPts val="1000"/>
               </a:spcAft>
+              <a:buSzPct val="100000"/>
               <a:buChar char="•"/>
               <a:lnSpc>
                 <a:spcPts val="2200"/>
@@ -21390,10 +21678,12 @@
           </a:bodyPr>
           <a:lstStyle/>
           <a:p>
-            <a:pPr>
+            <a:pPr lvl="0" marL="457200" indent="-228600">
+              <a:buFont typeface="Calibri"/>
               <a:spcAft>
                 <a:spcPts val="1000"/>
               </a:spcAft>
+              <a:buSzPct val="100000"/>
               <a:buChar char="•"/>
               <a:lnSpc>
                 <a:spcPts val="2200"/>
@@ -21410,10 +21700,12 @@
             </a:r>
           </a:p>
           <a:p>
-            <a:pPr>
+            <a:pPr lvl="0" marL="457200" indent="-228600">
+              <a:buFont typeface="Calibri"/>
               <a:spcAft>
                 <a:spcPts val="1000"/>
               </a:spcAft>
+              <a:buSzPct val="100000"/>
               <a:buChar char="•"/>
               <a:lnSpc>
                 <a:spcPts val="2200"/>
@@ -21430,10 +21722,12 @@
             </a:r>
           </a:p>
           <a:p>
-            <a:pPr>
+            <a:pPr lvl="0" marL="457200" indent="-228600">
+              <a:buFont typeface="Calibri"/>
               <a:spcAft>
                 <a:spcPts val="1000"/>
               </a:spcAft>
+              <a:buSzPct val="100000"/>
               <a:buChar char="•"/>
               <a:lnSpc>
                 <a:spcPts val="2200"/>
@@ -21569,10 +21863,12 @@
           </a:bodyPr>
           <a:lstStyle/>
           <a:p>
-            <a:pPr>
+            <a:pPr lvl="0" marL="457200" indent="-228600">
+              <a:buFont typeface="Calibri"/>
               <a:spcAft>
                 <a:spcPts val="1000"/>
               </a:spcAft>
+              <a:buSzPct val="100000"/>
               <a:buChar char="•"/>
               <a:lnSpc>
                 <a:spcPts val="2200"/>
@@ -21589,10 +21885,12 @@
             </a:r>
           </a:p>
           <a:p>
-            <a:pPr>
+            <a:pPr lvl="0" marL="457200" indent="-228600">
+              <a:buFont typeface="Calibri"/>
               <a:spcAft>
                 <a:spcPts val="1000"/>
               </a:spcAft>
+              <a:buSzPct val="100000"/>
               <a:buChar char="•"/>
               <a:lnSpc>
                 <a:spcPts val="2200"/>
@@ -21728,10 +22026,12 @@
           </a:bodyPr>
           <a:lstStyle/>
           <a:p>
-            <a:pPr>
+            <a:pPr lvl="0" marL="457200" indent="-228600">
+              <a:buFont typeface="Calibri"/>
               <a:spcAft>
                 <a:spcPts val="1000"/>
               </a:spcAft>
+              <a:buSzPct val="100000"/>
               <a:buChar char="•"/>
               <a:lnSpc>
                 <a:spcPts val="2200"/>
@@ -21867,10 +22167,12 @@
           </a:bodyPr>
           <a:lstStyle/>
           <a:p>
-            <a:pPr>
+            <a:pPr lvl="0" marL="457200" indent="-228600">
+              <a:buFont typeface="Calibri"/>
               <a:spcAft>
                 <a:spcPts val="1000"/>
               </a:spcAft>
+              <a:buSzPct val="100000"/>
               <a:buChar char="•"/>
               <a:lnSpc>
                 <a:spcPts val="2200"/>
@@ -21887,10 +22189,12 @@
             </a:r>
           </a:p>
           <a:p>
-            <a:pPr>
+            <a:pPr lvl="0" marL="457200" indent="-228600">
+              <a:buFont typeface="Calibri"/>
               <a:spcAft>
                 <a:spcPts val="1000"/>
               </a:spcAft>
+              <a:buSzPct val="100000"/>
               <a:buChar char="•"/>
               <a:lnSpc>
                 <a:spcPts val="2200"/>
@@ -21907,10 +22211,12 @@
             </a:r>
           </a:p>
           <a:p>
-            <a:pPr>
+            <a:pPr lvl="0" marL="457200" indent="-228600">
+              <a:buFont typeface="Calibri"/>
               <a:spcAft>
                 <a:spcPts val="1000"/>
               </a:spcAft>
+              <a:buSzPct val="100000"/>
               <a:buChar char="•"/>
               <a:lnSpc>
                 <a:spcPts val="2200"/>
@@ -22046,10 +22352,12 @@
           </a:bodyPr>
           <a:lstStyle/>
           <a:p>
-            <a:pPr>
+            <a:pPr lvl="0" marL="457200" indent="-228600">
+              <a:buFont typeface="Calibri"/>
               <a:spcAft>
                 <a:spcPts val="1000"/>
               </a:spcAft>
+              <a:buSzPct val="100000"/>
               <a:buChar char="•"/>
               <a:lnSpc>
                 <a:spcPts val="2200"/>
@@ -22066,10 +22374,12 @@
             </a:r>
           </a:p>
           <a:p>
-            <a:pPr>
+            <a:pPr lvl="0" marL="457200" indent="-228600">
+              <a:buFont typeface="Calibri"/>
               <a:spcAft>
                 <a:spcPts val="1000"/>
               </a:spcAft>
+              <a:buSzPct val="100000"/>
               <a:buChar char="•"/>
               <a:lnSpc>
                 <a:spcPts val="2200"/>
@@ -22086,10 +22396,12 @@
             </a:r>
           </a:p>
           <a:p>
-            <a:pPr>
+            <a:pPr lvl="0" marL="457200" indent="-228600">
+              <a:buFont typeface="Calibri"/>
               <a:spcAft>
                 <a:spcPts val="1000"/>
               </a:spcAft>
+              <a:buSzPct val="100000"/>
               <a:buChar char="•"/>
               <a:lnSpc>
                 <a:spcPts val="2200"/>
@@ -22106,10 +22418,12 @@
             </a:r>
           </a:p>
           <a:p>
-            <a:pPr>
+            <a:pPr lvl="0" marL="457200" indent="-228600">
+              <a:buFont typeface="Calibri"/>
               <a:spcAft>
                 <a:spcPts val="1000"/>
               </a:spcAft>
+              <a:buSzPct val="100000"/>
               <a:buChar char="•"/>
               <a:lnSpc>
                 <a:spcPts val="2200"/>
@@ -22126,10 +22440,12 @@
             </a:r>
           </a:p>
           <a:p>
-            <a:pPr>
+            <a:pPr lvl="0" marL="457200" indent="-228600">
+              <a:buFont typeface="Calibri"/>
               <a:spcAft>
                 <a:spcPts val="1000"/>
               </a:spcAft>
+              <a:buSzPct val="100000"/>
               <a:buChar char="•"/>
               <a:lnSpc>
                 <a:spcPts val="2200"/>
@@ -22265,10 +22581,12 @@
           </a:bodyPr>
           <a:lstStyle/>
           <a:p>
-            <a:pPr>
+            <a:pPr lvl="0" marL="457200" indent="-228600">
+              <a:buFont typeface="Calibri"/>
               <a:spcAft>
                 <a:spcPts val="1000"/>
               </a:spcAft>
+              <a:buSzPct val="100000"/>
               <a:buChar char="•"/>
               <a:lnSpc>
                 <a:spcPts val="2200"/>
@@ -22285,10 +22603,12 @@
             </a:r>
           </a:p>
           <a:p>
-            <a:pPr>
+            <a:pPr lvl="0" marL="457200" indent="-228600">
+              <a:buFont typeface="Calibri"/>
               <a:spcAft>
                 <a:spcPts val="1000"/>
               </a:spcAft>
+              <a:buSzPct val="100000"/>
               <a:buChar char="•"/>
               <a:lnSpc>
                 <a:spcPts val="2200"/>
@@ -22424,10 +22744,12 @@
           </a:bodyPr>
           <a:lstStyle/>
           <a:p>
-            <a:pPr>
+            <a:pPr lvl="0" marL="457200" indent="-228600">
+              <a:buFont typeface="Calibri"/>
               <a:spcAft>
                 <a:spcPts val="1000"/>
               </a:spcAft>
+              <a:buSzPct val="100000"/>
               <a:buChar char="•"/>
               <a:lnSpc>
                 <a:spcPts val="2200"/>
@@ -22444,10 +22766,12 @@
             </a:r>
           </a:p>
           <a:p>
-            <a:pPr>
+            <a:pPr lvl="0" marL="457200" indent="-228600">
+              <a:buFont typeface="Calibri"/>
               <a:spcAft>
                 <a:spcPts val="1000"/>
               </a:spcAft>
+              <a:buSzPct val="100000"/>
               <a:buChar char="•"/>
               <a:lnSpc>
                 <a:spcPts val="2200"/>
@@ -22464,10 +22788,12 @@
             </a:r>
           </a:p>
           <a:p>
-            <a:pPr>
+            <a:pPr lvl="0" marL="457200" indent="-228600">
+              <a:buFont typeface="Calibri"/>
               <a:spcAft>
                 <a:spcPts val="1000"/>
               </a:spcAft>
+              <a:buSzPct val="100000"/>
               <a:buChar char="•"/>
               <a:lnSpc>
                 <a:spcPts val="2200"/>
@@ -22603,10 +22929,12 @@
           </a:bodyPr>
           <a:lstStyle/>
           <a:p>
-            <a:pPr>
+            <a:pPr lvl="0" marL="457200" indent="-228600">
+              <a:buFont typeface="Calibri"/>
               <a:spcAft>
                 <a:spcPts val="1000"/>
               </a:spcAft>
+              <a:buSzPct val="100000"/>
               <a:buChar char="•"/>
               <a:lnSpc>
                 <a:spcPts val="2200"/>
@@ -22623,10 +22951,12 @@
             </a:r>
           </a:p>
           <a:p>
-            <a:pPr>
+            <a:pPr lvl="0" marL="457200" indent="-228600">
+              <a:buFont typeface="Calibri"/>
               <a:spcAft>
                 <a:spcPts val="1000"/>
               </a:spcAft>
+              <a:buSzPct val="100000"/>
               <a:buChar char="•"/>
               <a:lnSpc>
                 <a:spcPts val="2200"/>
@@ -22643,10 +22973,12 @@
             </a:r>
           </a:p>
           <a:p>
-            <a:pPr>
+            <a:pPr lvl="0" marL="457200" indent="-228600">
+              <a:buFont typeface="Calibri"/>
               <a:spcAft>
                 <a:spcPts val="1000"/>
               </a:spcAft>
+              <a:buSzPct val="100000"/>
               <a:buChar char="•"/>
               <a:lnSpc>
                 <a:spcPts val="2200"/>
@@ -22663,10 +22995,12 @@
             </a:r>
           </a:p>
           <a:p>
-            <a:pPr>
+            <a:pPr lvl="0" marL="457200" indent="-228600">
+              <a:buFont typeface="Calibri"/>
               <a:spcAft>
                 <a:spcPts val="1000"/>
               </a:spcAft>
+              <a:buSzPct val="100000"/>
               <a:buChar char="•"/>
               <a:lnSpc>
                 <a:spcPts val="2200"/>
@@ -22802,10 +23136,12 @@
           </a:bodyPr>
           <a:lstStyle/>
           <a:p>
-            <a:pPr>
+            <a:pPr lvl="0" marL="457200" indent="-228600">
+              <a:buFont typeface="Calibri"/>
               <a:spcAft>
                 <a:spcPts val="1000"/>
               </a:spcAft>
+              <a:buSzPct val="100000"/>
               <a:buChar char="•"/>
               <a:lnSpc>
                 <a:spcPts val="2200"/>
@@ -22822,10 +23158,12 @@
             </a:r>
           </a:p>
           <a:p>
-            <a:pPr>
+            <a:pPr lvl="0" marL="457200" indent="-228600">
+              <a:buFont typeface="Calibri"/>
               <a:spcAft>
                 <a:spcPts val="1000"/>
               </a:spcAft>
+              <a:buSzPct val="100000"/>
               <a:buChar char="•"/>
               <a:lnSpc>
                 <a:spcPts val="2200"/>
@@ -22961,10 +23299,12 @@
           </a:bodyPr>
           <a:lstStyle/>
           <a:p>
-            <a:pPr>
+            <a:pPr lvl="0" marL="457200" indent="-228600">
+              <a:buFont typeface="Calibri"/>
               <a:spcAft>
                 <a:spcPts val="1000"/>
               </a:spcAft>
+              <a:buSzPct val="100000"/>
               <a:buChar char="•"/>
               <a:lnSpc>
                 <a:spcPts val="2200"/>
@@ -22981,10 +23321,12 @@
             </a:r>
           </a:p>
           <a:p>
-            <a:pPr>
+            <a:pPr lvl="0" marL="457200" indent="-228600">
+              <a:buFont typeface="Calibri"/>
               <a:spcAft>
                 <a:spcPts val="1000"/>
               </a:spcAft>
+              <a:buSzPct val="100000"/>
               <a:buChar char="•"/>
               <a:lnSpc>
                 <a:spcPts val="2200"/>
@@ -23001,10 +23343,12 @@
             </a:r>
           </a:p>
           <a:p>
-            <a:pPr>
+            <a:pPr lvl="0" marL="457200" indent="-228600">
+              <a:buFont typeface="Calibri"/>
               <a:spcAft>
                 <a:spcPts val="1000"/>
               </a:spcAft>
+              <a:buSzPct val="100000"/>
               <a:buChar char="•"/>
               <a:lnSpc>
                 <a:spcPts val="2200"/>
@@ -23021,10 +23365,12 @@
             </a:r>
           </a:p>
           <a:p>
-            <a:pPr>
+            <a:pPr lvl="0" marL="457200" indent="-228600">
+              <a:buFont typeface="Calibri"/>
               <a:spcAft>
                 <a:spcPts val="1000"/>
               </a:spcAft>
+              <a:buSzPct val="100000"/>
               <a:buChar char="•"/>
               <a:lnSpc>
                 <a:spcPts val="2200"/>
@@ -23041,10 +23387,12 @@
             </a:r>
           </a:p>
           <a:p>
-            <a:pPr>
+            <a:pPr lvl="0" marL="457200" indent="-228600">
+              <a:buFont typeface="Calibri"/>
               <a:spcAft>
                 <a:spcPts val="1000"/>
               </a:spcAft>
+              <a:buSzPct val="100000"/>
               <a:buChar char="•"/>
               <a:lnSpc>
                 <a:spcPts val="2200"/>
@@ -23061,10 +23409,12 @@
             </a:r>
           </a:p>
           <a:p>
-            <a:pPr>
+            <a:pPr lvl="0" marL="457200" indent="-228600">
+              <a:buFont typeface="Calibri"/>
               <a:spcAft>
                 <a:spcPts val="1000"/>
               </a:spcAft>
+              <a:buSzPct val="100000"/>
               <a:buChar char="•"/>
               <a:lnSpc>
                 <a:spcPts val="2200"/>
@@ -23200,10 +23550,12 @@
           </a:bodyPr>
           <a:lstStyle/>
           <a:p>
-            <a:pPr>
+            <a:pPr lvl="0" marL="457200" indent="-228600">
+              <a:buFont typeface="Calibri"/>
               <a:spcAft>
                 <a:spcPts val="1000"/>
               </a:spcAft>
+              <a:buSzPct val="100000"/>
               <a:buChar char="•"/>
               <a:lnSpc>
                 <a:spcPts val="2200"/>
@@ -23220,10 +23572,12 @@
             </a:r>
           </a:p>
           <a:p>
-            <a:pPr>
+            <a:pPr lvl="0" marL="457200" indent="-228600">
+              <a:buFont typeface="Calibri"/>
               <a:spcAft>
                 <a:spcPts val="1000"/>
               </a:spcAft>
+              <a:buSzPct val="100000"/>
               <a:buChar char="•"/>
               <a:lnSpc>
                 <a:spcPts val="2200"/>
@@ -23240,10 +23594,12 @@
             </a:r>
           </a:p>
           <a:p>
-            <a:pPr>
+            <a:pPr lvl="0" marL="457200" indent="-228600">
+              <a:buFont typeface="Calibri"/>
               <a:spcAft>
                 <a:spcPts val="1000"/>
               </a:spcAft>
+              <a:buSzPct val="100000"/>
               <a:buChar char="•"/>
               <a:lnSpc>
                 <a:spcPts val="2200"/>
@@ -23379,10 +23735,12 @@
           </a:bodyPr>
           <a:lstStyle/>
           <a:p>
-            <a:pPr>
+            <a:pPr lvl="0" marL="457200" indent="-228600">
+              <a:buFont typeface="Calibri"/>
               <a:spcAft>
                 <a:spcPts val="1000"/>
               </a:spcAft>
+              <a:buSzPct val="100000"/>
               <a:buChar char="•"/>
               <a:lnSpc>
                 <a:spcPts val="2200"/>
@@ -23399,10 +23757,12 @@
             </a:r>
           </a:p>
           <a:p>
-            <a:pPr>
+            <a:pPr lvl="0" marL="457200" indent="-228600">
+              <a:buFont typeface="Calibri"/>
               <a:spcAft>
                 <a:spcPts val="1000"/>
               </a:spcAft>
+              <a:buSzPct val="100000"/>
               <a:buChar char="•"/>
               <a:lnSpc>
                 <a:spcPts val="2200"/>
@@ -23419,10 +23779,12 @@
             </a:r>
           </a:p>
           <a:p>
-            <a:pPr>
+            <a:pPr lvl="0" marL="457200" indent="-228600">
+              <a:buFont typeface="Calibri"/>
               <a:spcAft>
                 <a:spcPts val="1000"/>
               </a:spcAft>
+              <a:buSzPct val="100000"/>
               <a:buChar char="•"/>
               <a:lnSpc>
                 <a:spcPts val="2200"/>
@@ -23558,10 +23920,12 @@
           </a:bodyPr>
           <a:lstStyle/>
           <a:p>
-            <a:pPr>
+            <a:pPr lvl="0" marL="457200" indent="-228600">
+              <a:buFont typeface="Calibri"/>
               <a:spcAft>
                 <a:spcPts val="1000"/>
               </a:spcAft>
+              <a:buSzPct val="100000"/>
               <a:buChar char="•"/>
               <a:lnSpc>
                 <a:spcPts val="2200"/>
@@ -23578,10 +23942,12 @@
             </a:r>
           </a:p>
           <a:p>
-            <a:pPr>
+            <a:pPr lvl="0" marL="457200" indent="-228600">
+              <a:buFont typeface="Calibri"/>
               <a:spcAft>
                 <a:spcPts val="1000"/>
               </a:spcAft>
+              <a:buSzPct val="100000"/>
               <a:buChar char="•"/>
               <a:lnSpc>
                 <a:spcPts val="2200"/>
@@ -23717,10 +24083,12 @@
           </a:bodyPr>
           <a:lstStyle/>
           <a:p>
-            <a:pPr>
+            <a:pPr lvl="0" marL="457200" indent="-228600">
+              <a:buFont typeface="Calibri"/>
               <a:spcAft>
                 <a:spcPts val="1000"/>
               </a:spcAft>
+              <a:buSzPct val="100000"/>
               <a:buChar char="•"/>
               <a:lnSpc>
                 <a:spcPts val="2200"/>
@@ -23856,10 +24224,12 @@
           </a:bodyPr>
           <a:lstStyle/>
           <a:p>
-            <a:pPr>
+            <a:pPr lvl="0" marL="457200" indent="-228600">
+              <a:buFont typeface="Calibri"/>
               <a:spcAft>
                 <a:spcPts val="1000"/>
               </a:spcAft>
+              <a:buSzPct val="100000"/>
               <a:buChar char="•"/>
               <a:lnSpc>
                 <a:spcPts val="2200"/>
@@ -23876,10 +24246,12 @@
             </a:r>
           </a:p>
           <a:p>
-            <a:pPr>
+            <a:pPr lvl="0" marL="457200" indent="-228600">
+              <a:buFont typeface="Calibri"/>
               <a:spcAft>
                 <a:spcPts val="1000"/>
               </a:spcAft>
+              <a:buSzPct val="100000"/>
               <a:buChar char="•"/>
               <a:lnSpc>
                 <a:spcPts val="2200"/>
@@ -23896,10 +24268,12 @@
             </a:r>
           </a:p>
           <a:p>
-            <a:pPr>
+            <a:pPr lvl="0" marL="457200" indent="-228600">
+              <a:buFont typeface="Calibri"/>
               <a:spcAft>
                 <a:spcPts val="1000"/>
               </a:spcAft>
+              <a:buSzPct val="100000"/>
               <a:buChar char="•"/>
               <a:lnSpc>
                 <a:spcPts val="2200"/>
@@ -24035,10 +24409,12 @@
           </a:bodyPr>
           <a:lstStyle/>
           <a:p>
-            <a:pPr>
+            <a:pPr lvl="0" marL="457200" indent="-228600">
+              <a:buFont typeface="Calibri"/>
               <a:spcAft>
                 <a:spcPts val="1000"/>
               </a:spcAft>
+              <a:buSzPct val="100000"/>
               <a:buChar char="•"/>
               <a:lnSpc>
                 <a:spcPts val="2200"/>
@@ -24055,10 +24431,12 @@
             </a:r>
           </a:p>
           <a:p>
-            <a:pPr>
+            <a:pPr lvl="0" marL="457200" indent="-228600">
+              <a:buFont typeface="Calibri"/>
               <a:spcAft>
                 <a:spcPts val="1000"/>
               </a:spcAft>
+              <a:buSzPct val="100000"/>
               <a:buChar char="•"/>
               <a:lnSpc>
                 <a:spcPts val="2200"/>
@@ -24075,10 +24453,12 @@
             </a:r>
           </a:p>
           <a:p>
-            <a:pPr>
+            <a:pPr lvl="0" marL="457200" indent="-228600">
+              <a:buFont typeface="Calibri"/>
               <a:spcAft>
                 <a:spcPts val="1000"/>
               </a:spcAft>
+              <a:buSzPct val="100000"/>
               <a:buChar char="•"/>
               <a:lnSpc>
                 <a:spcPts val="2200"/>
@@ -24214,10 +24594,12 @@
           </a:bodyPr>
           <a:lstStyle/>
           <a:p>
-            <a:pPr>
+            <a:pPr lvl="0" marL="457200" indent="-228600">
+              <a:buFont typeface="Calibri"/>
               <a:spcAft>
                 <a:spcPts val="1000"/>
               </a:spcAft>
+              <a:buSzPct val="100000"/>
               <a:buChar char="•"/>
               <a:lnSpc>
                 <a:spcPts val="2200"/>
@@ -24234,10 +24616,12 @@
             </a:r>
           </a:p>
           <a:p>
-            <a:pPr>
+            <a:pPr lvl="0" marL="457200" indent="-228600">
+              <a:buFont typeface="Calibri"/>
               <a:spcAft>
                 <a:spcPts val="1000"/>
               </a:spcAft>
+              <a:buSzPct val="100000"/>
               <a:buChar char="•"/>
               <a:lnSpc>
                 <a:spcPts val="2200"/>
@@ -24254,10 +24638,12 @@
             </a:r>
           </a:p>
           <a:p>
-            <a:pPr>
+            <a:pPr lvl="0" marL="457200" indent="-228600">
+              <a:buFont typeface="Calibri"/>
               <a:spcAft>
                 <a:spcPts val="1000"/>
               </a:spcAft>
+              <a:buSzPct val="100000"/>
               <a:buChar char="•"/>
               <a:lnSpc>
                 <a:spcPts val="2200"/>
@@ -24393,10 +24779,12 @@
           </a:bodyPr>
           <a:lstStyle/>
           <a:p>
-            <a:pPr>
+            <a:pPr lvl="0" marL="457200" indent="-228600">
+              <a:buFont typeface="Calibri"/>
               <a:spcAft>
                 <a:spcPts val="1000"/>
               </a:spcAft>
+              <a:buSzPct val="100000"/>
               <a:buChar char="•"/>
               <a:lnSpc>
                 <a:spcPts val="2200"/>
@@ -24413,10 +24801,12 @@
             </a:r>
           </a:p>
           <a:p>
-            <a:pPr>
+            <a:pPr lvl="0" marL="457200" indent="-228600">
+              <a:buFont typeface="Calibri"/>
               <a:spcAft>
                 <a:spcPts val="1000"/>
               </a:spcAft>
+              <a:buSzPct val="100000"/>
               <a:buChar char="•"/>
               <a:lnSpc>
                 <a:spcPts val="2200"/>
@@ -24433,10 +24823,12 @@
             </a:r>
           </a:p>
           <a:p>
-            <a:pPr>
+            <a:pPr lvl="0" marL="457200" indent="-228600">
+              <a:buFont typeface="Calibri"/>
               <a:spcAft>
                 <a:spcPts val="1000"/>
               </a:spcAft>
+              <a:buSzPct val="100000"/>
               <a:buChar char="•"/>
               <a:lnSpc>
                 <a:spcPts val="2200"/>
@@ -24453,10 +24845,12 @@
             </a:r>
           </a:p>
           <a:p>
-            <a:pPr>
+            <a:pPr lvl="0" marL="457200" indent="-228600">
+              <a:buFont typeface="Calibri"/>
               <a:spcAft>
                 <a:spcPts val="1000"/>
               </a:spcAft>
+              <a:buSzPct val="100000"/>
               <a:buChar char="•"/>
               <a:lnSpc>
                 <a:spcPts val="2200"/>
@@ -24592,10 +24986,12 @@
           </a:bodyPr>
           <a:lstStyle/>
           <a:p>
-            <a:pPr>
+            <a:pPr lvl="0" marL="457200" indent="-228600">
+              <a:buFont typeface="Calibri"/>
               <a:spcAft>
                 <a:spcPts val="1000"/>
               </a:spcAft>
+              <a:buSzPct val="100000"/>
               <a:buChar char="•"/>
               <a:lnSpc>
                 <a:spcPts val="2200"/>
@@ -24612,10 +25008,12 @@
             </a:r>
           </a:p>
           <a:p>
-            <a:pPr>
+            <a:pPr lvl="0" marL="457200" indent="-228600">
+              <a:buFont typeface="Calibri"/>
               <a:spcAft>
                 <a:spcPts val="1000"/>
               </a:spcAft>
+              <a:buSzPct val="100000"/>
               <a:buChar char="•"/>
               <a:lnSpc>
                 <a:spcPts val="2200"/>
@@ -24632,10 +25030,12 @@
             </a:r>
           </a:p>
           <a:p>
-            <a:pPr>
+            <a:pPr lvl="0" marL="457200" indent="-228600">
+              <a:buFont typeface="Calibri"/>
               <a:spcAft>
                 <a:spcPts val="1000"/>
               </a:spcAft>
+              <a:buSzPct val="100000"/>
               <a:buChar char="•"/>
               <a:lnSpc>
                 <a:spcPts val="2200"/>
@@ -24771,10 +25171,12 @@
           </a:bodyPr>
           <a:lstStyle/>
           <a:p>
-            <a:pPr>
+            <a:pPr lvl="0" marL="457200" indent="-228600">
+              <a:buFont typeface="Calibri"/>
               <a:spcAft>
                 <a:spcPts val="1000"/>
               </a:spcAft>
+              <a:buSzPct val="100000"/>
               <a:buChar char="•"/>
               <a:lnSpc>
                 <a:spcPts val="2200"/>
@@ -24791,10 +25193,12 @@
             </a:r>
           </a:p>
           <a:p>
-            <a:pPr>
+            <a:pPr lvl="0" marL="457200" indent="-228600">
+              <a:buFont typeface="Calibri"/>
               <a:spcAft>
                 <a:spcPts val="1000"/>
               </a:spcAft>
+              <a:buSzPct val="100000"/>
               <a:buChar char="•"/>
               <a:lnSpc>
                 <a:spcPts val="2200"/>
@@ -24930,10 +25334,12 @@
           </a:bodyPr>
           <a:lstStyle/>
           <a:p>
-            <a:pPr>
+            <a:pPr lvl="0" marL="457200" indent="-228600">
+              <a:buFont typeface="Calibri"/>
               <a:spcAft>
                 <a:spcPts val="1000"/>
               </a:spcAft>
+              <a:buSzPct val="100000"/>
               <a:buChar char="•"/>
               <a:lnSpc>
                 <a:spcPts val="2200"/>
@@ -24950,10 +25356,12 @@
             </a:r>
           </a:p>
           <a:p>
-            <a:pPr>
+            <a:pPr lvl="0" marL="457200" indent="-228600">
+              <a:buFont typeface="Calibri"/>
               <a:spcAft>
                 <a:spcPts val="1000"/>
               </a:spcAft>
+              <a:buSzPct val="100000"/>
               <a:buChar char="•"/>
               <a:lnSpc>
                 <a:spcPts val="2200"/>
@@ -24970,10 +25378,12 @@
             </a:r>
           </a:p>
           <a:p>
-            <a:pPr>
+            <a:pPr lvl="0" marL="457200" indent="-228600">
+              <a:buFont typeface="Calibri"/>
               <a:spcAft>
                 <a:spcPts val="1000"/>
               </a:spcAft>
+              <a:buSzPct val="100000"/>
               <a:buChar char="•"/>
               <a:lnSpc>
                 <a:spcPts val="2200"/>
@@ -25109,10 +25519,12 @@
           </a:bodyPr>
           <a:lstStyle/>
           <a:p>
-            <a:pPr>
+            <a:pPr lvl="0" marL="457200" indent="-228600">
+              <a:buFont typeface="Calibri"/>
               <a:spcAft>
                 <a:spcPts val="1000"/>
               </a:spcAft>
+              <a:buSzPct val="100000"/>
               <a:buChar char="•"/>
               <a:lnSpc>
                 <a:spcPts val="2200"/>
@@ -25129,10 +25541,12 @@
             </a:r>
           </a:p>
           <a:p>
-            <a:pPr>
+            <a:pPr lvl="0" marL="457200" indent="-228600">
+              <a:buFont typeface="Calibri"/>
               <a:spcAft>
                 <a:spcPts val="1000"/>
               </a:spcAft>
+              <a:buSzPct val="100000"/>
               <a:buChar char="•"/>
               <a:lnSpc>
                 <a:spcPts val="2200"/>
@@ -25149,10 +25563,12 @@
             </a:r>
           </a:p>
           <a:p>
-            <a:pPr>
+            <a:pPr lvl="0" marL="457200" indent="-228600">
+              <a:buFont typeface="Calibri"/>
               <a:spcAft>
                 <a:spcPts val="1000"/>
               </a:spcAft>
+              <a:buSzPct val="100000"/>
               <a:buChar char="•"/>
               <a:lnSpc>
                 <a:spcPts val="2200"/>
@@ -25288,10 +25704,12 @@
           </a:bodyPr>
           <a:lstStyle/>
           <a:p>
-            <a:pPr>
+            <a:pPr lvl="0" marL="457200" indent="-228600">
+              <a:buFont typeface="Calibri"/>
               <a:spcAft>
                 <a:spcPts val="1000"/>
               </a:spcAft>
+              <a:buSzPct val="100000"/>
               <a:buChar char="•"/>
               <a:lnSpc>
                 <a:spcPts val="2200"/>
@@ -25308,10 +25726,12 @@
             </a:r>
           </a:p>
           <a:p>
-            <a:pPr>
+            <a:pPr lvl="0" marL="457200" indent="-228600">
+              <a:buFont typeface="Calibri"/>
               <a:spcAft>
                 <a:spcPts val="1000"/>
               </a:spcAft>
+              <a:buSzPct val="100000"/>
               <a:buChar char="•"/>
               <a:lnSpc>
                 <a:spcPts val="2200"/>
@@ -25447,10 +25867,12 @@
           </a:bodyPr>
           <a:lstStyle/>
           <a:p>
-            <a:pPr>
+            <a:pPr lvl="0" marL="457200" indent="-228600">
+              <a:buFont typeface="Calibri"/>
               <a:spcAft>
                 <a:spcPts val="1000"/>
               </a:spcAft>
+              <a:buSzPct val="100000"/>
               <a:buChar char="•"/>
               <a:lnSpc>
                 <a:spcPts val="2200"/>
@@ -25586,10 +26008,12 @@
           </a:bodyPr>
           <a:lstStyle/>
           <a:p>
-            <a:pPr>
+            <a:pPr lvl="0" marL="457200" indent="-228600">
+              <a:buFont typeface="Calibri"/>
               <a:spcAft>
                 <a:spcPts val="1000"/>
               </a:spcAft>
+              <a:buSzPct val="100000"/>
               <a:buChar char="•"/>
               <a:lnSpc>
                 <a:spcPts val="2200"/>
@@ -25606,10 +26030,12 @@
             </a:r>
           </a:p>
           <a:p>
-            <a:pPr>
+            <a:pPr lvl="0" marL="457200" indent="-228600">
+              <a:buFont typeface="Calibri"/>
               <a:spcAft>
                 <a:spcPts val="1000"/>
               </a:spcAft>
+              <a:buSzPct val="100000"/>
               <a:buChar char="•"/>
               <a:lnSpc>
                 <a:spcPts val="2200"/>
@@ -25626,10 +26052,12 @@
             </a:r>
           </a:p>
           <a:p>
-            <a:pPr>
+            <a:pPr lvl="0" marL="457200" indent="-228600">
+              <a:buFont typeface="Calibri"/>
               <a:spcAft>
                 <a:spcPts val="1000"/>
               </a:spcAft>
+              <a:buSzPct val="100000"/>
               <a:buChar char="•"/>
               <a:lnSpc>
                 <a:spcPts val="2200"/>
@@ -25765,10 +26193,12 @@
           </a:bodyPr>
           <a:lstStyle/>
           <a:p>
-            <a:pPr>
+            <a:pPr lvl="0" marL="457200" indent="-228600">
+              <a:buFont typeface="Calibri"/>
               <a:spcAft>
                 <a:spcPts val="1000"/>
               </a:spcAft>
+              <a:buSzPct val="100000"/>
               <a:buChar char="•"/>
               <a:lnSpc>
                 <a:spcPts val="2200"/>
@@ -25785,10 +26215,12 @@
             </a:r>
           </a:p>
           <a:p>
-            <a:pPr>
+            <a:pPr lvl="0" marL="457200" indent="-228600">
+              <a:buFont typeface="Calibri"/>
               <a:spcAft>
                 <a:spcPts val="1000"/>
               </a:spcAft>
+              <a:buSzPct val="100000"/>
               <a:buChar char="•"/>
               <a:lnSpc>
                 <a:spcPts val="2200"/>
@@ -25805,10 +26237,12 @@
             </a:r>
           </a:p>
           <a:p>
-            <a:pPr>
+            <a:pPr lvl="0" marL="457200" indent="-228600">
+              <a:buFont typeface="Calibri"/>
               <a:spcAft>
                 <a:spcPts val="1000"/>
               </a:spcAft>
+              <a:buSzPct val="100000"/>
               <a:buChar char="•"/>
               <a:lnSpc>
                 <a:spcPts val="2200"/>
@@ -25825,10 +26259,12 @@
             </a:r>
           </a:p>
           <a:p>
-            <a:pPr>
+            <a:pPr lvl="0" marL="457200" indent="-228600">
+              <a:buFont typeface="Calibri"/>
               <a:spcAft>
                 <a:spcPts val="1000"/>
               </a:spcAft>
+              <a:buSzPct val="100000"/>
               <a:buChar char="•"/>
               <a:lnSpc>
                 <a:spcPts val="2200"/>
@@ -25845,10 +26281,12 @@
             </a:r>
           </a:p>
           <a:p>
-            <a:pPr>
+            <a:pPr lvl="0" marL="457200" indent="-228600">
+              <a:buFont typeface="Calibri"/>
               <a:spcAft>
                 <a:spcPts val="1000"/>
               </a:spcAft>
+              <a:buSzPct val="100000"/>
               <a:buChar char="•"/>
               <a:lnSpc>
                 <a:spcPts val="2200"/>
@@ -25984,10 +26422,12 @@
           </a:bodyPr>
           <a:lstStyle/>
           <a:p>
-            <a:pPr>
+            <a:pPr lvl="0" marL="457200" indent="-228600">
+              <a:buFont typeface="Calibri"/>
               <a:spcAft>
                 <a:spcPts val="1000"/>
               </a:spcAft>
+              <a:buSzPct val="100000"/>
               <a:buChar char="•"/>
               <a:lnSpc>
                 <a:spcPts val="2200"/>
@@ -26004,10 +26444,12 @@
             </a:r>
           </a:p>
           <a:p>
-            <a:pPr>
+            <a:pPr lvl="0" marL="457200" indent="-228600">
+              <a:buFont typeface="Calibri"/>
               <a:spcAft>
                 <a:spcPts val="1000"/>
               </a:spcAft>
+              <a:buSzPct val="100000"/>
               <a:buChar char="•"/>
               <a:lnSpc>
                 <a:spcPts val="2200"/>
@@ -26024,10 +26466,12 @@
             </a:r>
           </a:p>
           <a:p>
-            <a:pPr>
+            <a:pPr lvl="0" marL="457200" indent="-228600">
+              <a:buFont typeface="Calibri"/>
               <a:spcAft>
                 <a:spcPts val="1000"/>
               </a:spcAft>
+              <a:buSzPct val="100000"/>
               <a:buChar char="•"/>
               <a:lnSpc>
                 <a:spcPts val="2200"/>
@@ -26163,10 +26607,12 @@
           </a:bodyPr>
           <a:lstStyle/>
           <a:p>
-            <a:pPr>
+            <a:pPr lvl="0" marL="457200" indent="-228600">
+              <a:buFont typeface="Calibri"/>
               <a:spcAft>
                 <a:spcPts val="1000"/>
               </a:spcAft>
+              <a:buSzPct val="100000"/>
               <a:buChar char="•"/>
               <a:lnSpc>
                 <a:spcPts val="2200"/>
@@ -26183,10 +26629,12 @@
             </a:r>
           </a:p>
           <a:p>
-            <a:pPr>
+            <a:pPr lvl="0" marL="457200" indent="-228600">
+              <a:buFont typeface="Calibri"/>
               <a:spcAft>
                 <a:spcPts val="1000"/>
               </a:spcAft>
+              <a:buSzPct val="100000"/>
               <a:buChar char="•"/>
               <a:lnSpc>
                 <a:spcPts val="2200"/>
@@ -26203,10 +26651,12 @@
             </a:r>
           </a:p>
           <a:p>
-            <a:pPr>
+            <a:pPr lvl="0" marL="457200" indent="-228600">
+              <a:buFont typeface="Calibri"/>
               <a:spcAft>
                 <a:spcPts val="1000"/>
               </a:spcAft>
+              <a:buSzPct val="100000"/>
               <a:buChar char="•"/>
               <a:lnSpc>
                 <a:spcPts val="2200"/>
@@ -26223,10 +26673,12 @@
             </a:r>
           </a:p>
           <a:p>
-            <a:pPr>
+            <a:pPr lvl="0" marL="457200" indent="-228600">
+              <a:buFont typeface="Calibri"/>
               <a:spcAft>
                 <a:spcPts val="1000"/>
               </a:spcAft>
+              <a:buSzPct val="100000"/>
               <a:buChar char="•"/>
               <a:lnSpc>
                 <a:spcPts val="2200"/>
@@ -26362,10 +26814,12 @@
           </a:bodyPr>
           <a:lstStyle/>
           <a:p>
-            <a:pPr>
+            <a:pPr lvl="0" marL="457200" indent="-228600">
+              <a:buFont typeface="Calibri"/>
               <a:spcAft>
                 <a:spcPts val="1000"/>
               </a:spcAft>
+              <a:buSzPct val="100000"/>
               <a:buChar char="•"/>
               <a:lnSpc>
                 <a:spcPts val="2200"/>
@@ -26382,10 +26836,12 @@
             </a:r>
           </a:p>
           <a:p>
-            <a:pPr>
+            <a:pPr lvl="0" marL="457200" indent="-228600">
+              <a:buFont typeface="Calibri"/>
               <a:spcAft>
                 <a:spcPts val="1000"/>
               </a:spcAft>
+              <a:buSzPct val="100000"/>
               <a:buChar char="•"/>
               <a:lnSpc>
                 <a:spcPts val="2200"/>
@@ -26521,10 +26977,12 @@
           </a:bodyPr>
           <a:lstStyle/>
           <a:p>
-            <a:pPr>
+            <a:pPr lvl="0" marL="457200" indent="-228600">
+              <a:buFont typeface="Calibri"/>
               <a:spcAft>
                 <a:spcPts val="1000"/>
               </a:spcAft>
+              <a:buSzPct val="100000"/>
               <a:buChar char="•"/>
               <a:lnSpc>
                 <a:spcPts val="2200"/>
@@ -26541,10 +26999,12 @@
             </a:r>
           </a:p>
           <a:p>
-            <a:pPr>
+            <a:pPr lvl="0" marL="457200" indent="-228600">
+              <a:buFont typeface="Calibri"/>
               <a:spcAft>
                 <a:spcPts val="1000"/>
               </a:spcAft>
+              <a:buSzPct val="100000"/>
               <a:buChar char="•"/>
               <a:lnSpc>
                 <a:spcPts val="2200"/>
@@ -26680,10 +27140,12 @@
           </a:bodyPr>
           <a:lstStyle/>
           <a:p>
-            <a:pPr>
+            <a:pPr lvl="0" marL="457200" indent="-228600">
+              <a:buFont typeface="Calibri"/>
               <a:spcAft>
                 <a:spcPts val="1000"/>
               </a:spcAft>
+              <a:buSzPct val="100000"/>
               <a:buChar char="•"/>
               <a:lnSpc>
                 <a:spcPts val="2200"/>
@@ -26700,10 +27162,12 @@
             </a:r>
           </a:p>
           <a:p>
-            <a:pPr>
+            <a:pPr lvl="0" marL="457200" indent="-228600">
+              <a:buFont typeface="Calibri"/>
               <a:spcAft>
                 <a:spcPts val="1000"/>
               </a:spcAft>
+              <a:buSzPct val="100000"/>
               <a:buChar char="•"/>
               <a:lnSpc>
                 <a:spcPts val="2200"/>
@@ -26720,10 +27184,12 @@
             </a:r>
           </a:p>
           <a:p>
-            <a:pPr>
+            <a:pPr lvl="0" marL="457200" indent="-228600">
+              <a:buFont typeface="Calibri"/>
               <a:spcAft>
                 <a:spcPts val="1000"/>
               </a:spcAft>
+              <a:buSzPct val="100000"/>
               <a:buChar char="•"/>
               <a:lnSpc>
                 <a:spcPts val="2200"/>
@@ -26740,10 +27206,12 @@
             </a:r>
           </a:p>
           <a:p>
-            <a:pPr>
+            <a:pPr lvl="0" marL="457200" indent="-228600">
+              <a:buFont typeface="Calibri"/>
               <a:spcAft>
                 <a:spcPts val="1000"/>
               </a:spcAft>
+              <a:buSzPct val="100000"/>
               <a:buChar char="•"/>
               <a:lnSpc>
                 <a:spcPts val="2200"/>
@@ -26760,10 +27228,12 @@
             </a:r>
           </a:p>
           <a:p>
-            <a:pPr>
+            <a:pPr lvl="0" marL="457200" indent="-228600">
+              <a:buFont typeface="Calibri"/>
               <a:spcAft>
                 <a:spcPts val="1000"/>
               </a:spcAft>
+              <a:buSzPct val="100000"/>
               <a:buChar char="•"/>
               <a:lnSpc>
                 <a:spcPts val="2200"/>
@@ -26899,10 +27369,12 @@
           </a:bodyPr>
           <a:lstStyle/>
           <a:p>
-            <a:pPr>
+            <a:pPr lvl="0" marL="457200" indent="-228600">
+              <a:buFont typeface="Calibri"/>
               <a:spcAft>
                 <a:spcPts val="1000"/>
               </a:spcAft>
+              <a:buSzPct val="100000"/>
               <a:buChar char="•"/>
               <a:lnSpc>
                 <a:spcPts val="2200"/>
@@ -26919,10 +27391,12 @@
             </a:r>
           </a:p>
           <a:p>
-            <a:pPr>
+            <a:pPr lvl="0" marL="457200" indent="-228600">
+              <a:buFont typeface="Calibri"/>
               <a:spcAft>
                 <a:spcPts val="1000"/>
               </a:spcAft>
+              <a:buSzPct val="100000"/>
               <a:buChar char="•"/>
               <a:lnSpc>
                 <a:spcPts val="2200"/>
@@ -26939,10 +27413,12 @@
             </a:r>
           </a:p>
           <a:p>
-            <a:pPr>
+            <a:pPr lvl="0" marL="457200" indent="-228600">
+              <a:buFont typeface="Calibri"/>
               <a:spcAft>
                 <a:spcPts val="1000"/>
               </a:spcAft>
+              <a:buSzPct val="100000"/>
               <a:buChar char="•"/>
               <a:lnSpc>
                 <a:spcPts val="2200"/>
@@ -26959,10 +27435,12 @@
             </a:r>
           </a:p>
           <a:p>
-            <a:pPr>
+            <a:pPr lvl="0" marL="457200" indent="-228600">
+              <a:buFont typeface="Calibri"/>
               <a:spcAft>
                 <a:spcPts val="1000"/>
               </a:spcAft>
+              <a:buSzPct val="100000"/>
               <a:buChar char="•"/>
               <a:lnSpc>
                 <a:spcPts val="2200"/>
@@ -26979,10 +27457,12 @@
             </a:r>
           </a:p>
           <a:p>
-            <a:pPr>
+            <a:pPr lvl="0" marL="457200" indent="-228600">
+              <a:buFont typeface="Calibri"/>
               <a:spcAft>
                 <a:spcPts val="1000"/>
               </a:spcAft>
+              <a:buSzPct val="100000"/>
               <a:buChar char="•"/>
               <a:lnSpc>
                 <a:spcPts val="2200"/>
@@ -26999,10 +27479,12 @@
             </a:r>
           </a:p>
           <a:p>
-            <a:pPr>
+            <a:pPr lvl="0" marL="457200" indent="-228600">
+              <a:buFont typeface="Calibri"/>
               <a:spcAft>
                 <a:spcPts val="1000"/>
               </a:spcAft>
+              <a:buSzPct val="100000"/>
               <a:buChar char="•"/>
               <a:lnSpc>
                 <a:spcPts val="2200"/>
@@ -27138,10 +27620,12 @@
           </a:bodyPr>
           <a:lstStyle/>
           <a:p>
-            <a:pPr>
+            <a:pPr lvl="0" marL="457200" indent="-228600">
+              <a:buFont typeface="Calibri"/>
               <a:spcAft>
                 <a:spcPts val="1000"/>
               </a:spcAft>
+              <a:buSzPct val="100000"/>
               <a:buChar char="•"/>
               <a:lnSpc>
                 <a:spcPts val="2200"/>
@@ -27158,10 +27642,12 @@
             </a:r>
           </a:p>
           <a:p>
-            <a:pPr>
+            <a:pPr lvl="0" marL="457200" indent="-228600">
+              <a:buFont typeface="Calibri"/>
               <a:spcAft>
                 <a:spcPts val="1000"/>
               </a:spcAft>
+              <a:buSzPct val="100000"/>
               <a:buChar char="•"/>
               <a:lnSpc>
                 <a:spcPts val="2200"/>
@@ -27297,10 +27783,12 @@
           </a:bodyPr>
           <a:lstStyle/>
           <a:p>
-            <a:pPr>
+            <a:pPr lvl="0" marL="457200" indent="-228600">
+              <a:buFont typeface="Calibri"/>
               <a:spcAft>
                 <a:spcPts val="1000"/>
               </a:spcAft>
+              <a:buSzPct val="100000"/>
               <a:buChar char="•"/>
               <a:lnSpc>
                 <a:spcPts val="2200"/>
@@ -27317,10 +27805,12 @@
             </a:r>
           </a:p>
           <a:p>
-            <a:pPr>
+            <a:pPr lvl="0" marL="457200" indent="-228600">
+              <a:buFont typeface="Calibri"/>
               <a:spcAft>
                 <a:spcPts val="1000"/>
               </a:spcAft>
+              <a:buSzPct val="100000"/>
               <a:buChar char="•"/>
               <a:lnSpc>
                 <a:spcPts val="2200"/>
@@ -27337,10 +27827,12 @@
             </a:r>
           </a:p>
           <a:p>
-            <a:pPr>
+            <a:pPr lvl="0" marL="457200" indent="-228600">
+              <a:buFont typeface="Calibri"/>
               <a:spcAft>
                 <a:spcPts val="1000"/>
               </a:spcAft>
+              <a:buSzPct val="100000"/>
               <a:buChar char="•"/>
               <a:lnSpc>
                 <a:spcPts val="2200"/>
@@ -27476,10 +27968,12 @@
           </a:bodyPr>
           <a:lstStyle/>
           <a:p>
-            <a:pPr>
+            <a:pPr lvl="0" marL="457200" indent="-228600">
+              <a:buFont typeface="Calibri"/>
               <a:spcAft>
                 <a:spcPts val="1000"/>
               </a:spcAft>
+              <a:buSzPct val="100000"/>
               <a:buChar char="•"/>
               <a:lnSpc>
                 <a:spcPts val="2200"/>
@@ -27496,10 +27990,12 @@
             </a:r>
           </a:p>
           <a:p>
-            <a:pPr>
+            <a:pPr lvl="0" marL="457200" indent="-228600">
+              <a:buFont typeface="Calibri"/>
               <a:spcAft>
                 <a:spcPts val="1000"/>
               </a:spcAft>
+              <a:buSzPct val="100000"/>
               <a:buChar char="•"/>
               <a:lnSpc>
                 <a:spcPts val="2200"/>
@@ -27635,10 +28131,12 @@
           </a:bodyPr>
           <a:lstStyle/>
           <a:p>
-            <a:pPr>
+            <a:pPr lvl="0" marL="457200" indent="-228600">
+              <a:buFont typeface="Calibri"/>
               <a:spcAft>
                 <a:spcPts val="1000"/>
               </a:spcAft>
+              <a:buSzPct val="100000"/>
               <a:buChar char="•"/>
               <a:lnSpc>
                 <a:spcPts val="2200"/>
@@ -27774,10 +28272,12 @@
           </a:bodyPr>
           <a:lstStyle/>
           <a:p>
-            <a:pPr>
+            <a:pPr lvl="0" marL="457200" indent="-228600">
+              <a:buFont typeface="Calibri"/>
               <a:spcAft>
                 <a:spcPts val="1000"/>
               </a:spcAft>
+              <a:buSzPct val="100000"/>
               <a:buChar char="•"/>
               <a:lnSpc>
                 <a:spcPts val="2200"/>
@@ -27794,10 +28294,12 @@
             </a:r>
           </a:p>
           <a:p>
-            <a:pPr>
+            <a:pPr lvl="0" marL="457200" indent="-228600">
+              <a:buFont typeface="Calibri"/>
               <a:spcAft>
                 <a:spcPts val="1000"/>
               </a:spcAft>
+              <a:buSzPct val="100000"/>
               <a:buChar char="•"/>
               <a:lnSpc>
                 <a:spcPts val="2200"/>
@@ -27814,10 +28316,12 @@
             </a:r>
           </a:p>
           <a:p>
-            <a:pPr>
+            <a:pPr lvl="0" marL="457200" indent="-228600">
+              <a:buFont typeface="Calibri"/>
               <a:spcAft>
                 <a:spcPts val="1000"/>
               </a:spcAft>
+              <a:buSzPct val="100000"/>
               <a:buChar char="•"/>
               <a:lnSpc>
                 <a:spcPts val="2200"/>
@@ -27953,10 +28457,12 @@
           </a:bodyPr>
           <a:lstStyle/>
           <a:p>
-            <a:pPr>
+            <a:pPr lvl="0" marL="457200" indent="-228600">
+              <a:buFont typeface="Calibri"/>
               <a:spcAft>
                 <a:spcPts val="1000"/>
               </a:spcAft>
+              <a:buSzPct val="100000"/>
               <a:buChar char="•"/>
               <a:lnSpc>
                 <a:spcPts val="2200"/>
@@ -27973,10 +28479,12 @@
             </a:r>
           </a:p>
           <a:p>
-            <a:pPr>
+            <a:pPr lvl="0" marL="457200" indent="-228600">
+              <a:buFont typeface="Calibri"/>
               <a:spcAft>
                 <a:spcPts val="1000"/>
               </a:spcAft>
+              <a:buSzPct val="100000"/>
               <a:buChar char="•"/>
               <a:lnSpc>
                 <a:spcPts val="2200"/>
@@ -27993,10 +28501,12 @@
             </a:r>
           </a:p>
           <a:p>
-            <a:pPr>
+            <a:pPr lvl="0" marL="457200" indent="-228600">
+              <a:buFont typeface="Calibri"/>
               <a:spcAft>
                 <a:spcPts val="1000"/>
               </a:spcAft>
+              <a:buSzPct val="100000"/>
               <a:buChar char="•"/>
               <a:lnSpc>
                 <a:spcPts val="2200"/>
@@ -28013,10 +28523,12 @@
             </a:r>
           </a:p>
           <a:p>
-            <a:pPr>
+            <a:pPr lvl="0" marL="457200" indent="-228600">
+              <a:buFont typeface="Calibri"/>
               <a:spcAft>
                 <a:spcPts val="1000"/>
               </a:spcAft>
+              <a:buSzPct val="100000"/>
               <a:buChar char="•"/>
               <a:lnSpc>
                 <a:spcPts val="2200"/>
@@ -28033,10 +28545,12 @@
             </a:r>
           </a:p>
           <a:p>
-            <a:pPr>
+            <a:pPr lvl="0" marL="457200" indent="-228600">
+              <a:buFont typeface="Calibri"/>
               <a:spcAft>
                 <a:spcPts val="1000"/>
               </a:spcAft>
+              <a:buSzPct val="100000"/>
               <a:buChar char="•"/>
               <a:lnSpc>
                 <a:spcPts val="2200"/>
@@ -28172,10 +28686,12 @@
           </a:bodyPr>
           <a:lstStyle/>
           <a:p>
-            <a:pPr>
+            <a:pPr lvl="0" marL="457200" indent="-228600">
+              <a:buFont typeface="Calibri"/>
               <a:spcAft>
                 <a:spcPts val="1000"/>
               </a:spcAft>
+              <a:buSzPct val="100000"/>
               <a:buChar char="•"/>
               <a:lnSpc>
                 <a:spcPts val="2200"/>
@@ -28192,10 +28708,12 @@
             </a:r>
           </a:p>
           <a:p>
-            <a:pPr>
+            <a:pPr lvl="0" marL="457200" indent="-228600">
+              <a:buFont typeface="Calibri"/>
               <a:spcAft>
                 <a:spcPts val="1000"/>
               </a:spcAft>
+              <a:buSzPct val="100000"/>
               <a:buChar char="•"/>
               <a:lnSpc>
                 <a:spcPts val="2200"/>
@@ -28212,10 +28730,12 @@
             </a:r>
           </a:p>
           <a:p>
-            <a:pPr>
+            <a:pPr lvl="0" marL="457200" indent="-228600">
+              <a:buFont typeface="Calibri"/>
               <a:spcAft>
                 <a:spcPts val="1000"/>
               </a:spcAft>
+              <a:buSzPct val="100000"/>
               <a:buChar char="•"/>
               <a:lnSpc>
                 <a:spcPts val="2200"/>
@@ -28351,10 +28871,12 @@
           </a:bodyPr>
           <a:lstStyle/>
           <a:p>
-            <a:pPr>
+            <a:pPr lvl="0" marL="457200" indent="-228600">
+              <a:buFont typeface="Calibri"/>
               <a:spcAft>
                 <a:spcPts val="1000"/>
               </a:spcAft>
+              <a:buSzPct val="100000"/>
               <a:buChar char="•"/>
               <a:lnSpc>
                 <a:spcPts val="2200"/>
@@ -28371,10 +28893,12 @@
             </a:r>
           </a:p>
           <a:p>
-            <a:pPr>
+            <a:pPr lvl="0" marL="457200" indent="-228600">
+              <a:buFont typeface="Calibri"/>
               <a:spcAft>
                 <a:spcPts val="1000"/>
               </a:spcAft>
+              <a:buSzPct val="100000"/>
               <a:buChar char="•"/>
               <a:lnSpc>
                 <a:spcPts val="2200"/>
@@ -28391,10 +28915,12 @@
             </a:r>
           </a:p>
           <a:p>
-            <a:pPr>
+            <a:pPr lvl="0" marL="457200" indent="-228600">
+              <a:buFont typeface="Calibri"/>
               <a:spcAft>
                 <a:spcPts val="1000"/>
               </a:spcAft>
+              <a:buSzPct val="100000"/>
               <a:buChar char="•"/>
               <a:lnSpc>
                 <a:spcPts val="2200"/>
@@ -28530,10 +29056,12 @@
           </a:bodyPr>
           <a:lstStyle/>
           <a:p>
-            <a:pPr>
+            <a:pPr lvl="0" marL="457200" indent="-228600">
+              <a:buFont typeface="Calibri"/>
               <a:spcAft>
                 <a:spcPts val="1000"/>
               </a:spcAft>
+              <a:buSzPct val="100000"/>
               <a:buChar char="•"/>
               <a:lnSpc>
                 <a:spcPts val="2200"/>
@@ -28550,10 +29078,12 @@
             </a:r>
           </a:p>
           <a:p>
-            <a:pPr>
+            <a:pPr lvl="0" marL="457200" indent="-228600">
+              <a:buFont typeface="Calibri"/>
               <a:spcAft>
                 <a:spcPts val="1000"/>
               </a:spcAft>
+              <a:buSzPct val="100000"/>
               <a:buChar char="•"/>
               <a:lnSpc>
                 <a:spcPts val="2200"/>
@@ -28570,10 +29100,12 @@
             </a:r>
           </a:p>
           <a:p>
-            <a:pPr>
+            <a:pPr lvl="0" marL="457200" indent="-228600">
+              <a:buFont typeface="Calibri"/>
               <a:spcAft>
                 <a:spcPts val="1000"/>
               </a:spcAft>
+              <a:buSzPct val="100000"/>
               <a:buChar char="•"/>
               <a:lnSpc>
                 <a:spcPts val="2200"/>
@@ -28590,10 +29122,12 @@
             </a:r>
           </a:p>
           <a:p>
-            <a:pPr>
+            <a:pPr lvl="0" marL="457200" indent="-228600">
+              <a:buFont typeface="Calibri"/>
               <a:spcAft>
                 <a:spcPts val="1000"/>
               </a:spcAft>
+              <a:buSzPct val="100000"/>
               <a:buChar char="•"/>
               <a:lnSpc>
                 <a:spcPts val="2200"/>
@@ -28729,10 +29263,12 @@
           </a:bodyPr>
           <a:lstStyle/>
           <a:p>
-            <a:pPr>
+            <a:pPr lvl="0" marL="457200" indent="-228600">
+              <a:buFont typeface="Calibri"/>
               <a:spcAft>
                 <a:spcPts val="1000"/>
               </a:spcAft>
+              <a:buSzPct val="100000"/>
               <a:buChar char="•"/>
               <a:lnSpc>
                 <a:spcPts val="2200"/>
@@ -28749,10 +29285,12 @@
             </a:r>
           </a:p>
           <a:p>
-            <a:pPr>
+            <a:pPr lvl="0" marL="457200" indent="-228600">
+              <a:buFont typeface="Calibri"/>
               <a:spcAft>
                 <a:spcPts val="1000"/>
               </a:spcAft>
+              <a:buSzPct val="100000"/>
               <a:buChar char="•"/>
               <a:lnSpc>
                 <a:spcPts val="2200"/>
@@ -28888,10 +29426,12 @@
           </a:bodyPr>
           <a:lstStyle/>
           <a:p>
-            <a:pPr>
+            <a:pPr lvl="0" marL="457200" indent="-228600">
+              <a:buFont typeface="Calibri"/>
               <a:spcAft>
                 <a:spcPts val="1000"/>
               </a:spcAft>
+              <a:buSzPct val="100000"/>
               <a:buChar char="•"/>
               <a:lnSpc>
                 <a:spcPts val="2200"/>
@@ -28908,10 +29448,12 @@
             </a:r>
           </a:p>
           <a:p>
-            <a:pPr>
+            <a:pPr lvl="0" marL="457200" indent="-228600">
+              <a:buFont typeface="Calibri"/>
               <a:spcAft>
                 <a:spcPts val="1000"/>
               </a:spcAft>
+              <a:buSzPct val="100000"/>
               <a:buChar char="•"/>
               <a:lnSpc>
                 <a:spcPts val="2200"/>
@@ -28928,10 +29470,12 @@
             </a:r>
           </a:p>
           <a:p>
-            <a:pPr>
+            <a:pPr lvl="0" marL="457200" indent="-228600">
+              <a:buFont typeface="Calibri"/>
               <a:spcAft>
                 <a:spcPts val="1000"/>
               </a:spcAft>
+              <a:buSzPct val="100000"/>
               <a:buChar char="•"/>
               <a:lnSpc>
                 <a:spcPts val="2200"/>
@@ -28948,10 +29492,12 @@
             </a:r>
           </a:p>
           <a:p>
-            <a:pPr>
+            <a:pPr lvl="0" marL="457200" indent="-228600">
+              <a:buFont typeface="Calibri"/>
               <a:spcAft>
                 <a:spcPts val="1000"/>
               </a:spcAft>
+              <a:buSzPct val="100000"/>
               <a:buChar char="•"/>
               <a:lnSpc>
                 <a:spcPts val="2200"/>
@@ -29087,10 +29633,12 @@
           </a:bodyPr>
           <a:lstStyle/>
           <a:p>
-            <a:pPr>
+            <a:pPr lvl="0" marL="457200" indent="-228600">
+              <a:buFont typeface="Calibri"/>
               <a:spcAft>
                 <a:spcPts val="1000"/>
               </a:spcAft>
+              <a:buSzPct val="100000"/>
               <a:buChar char="•"/>
               <a:lnSpc>
                 <a:spcPts val="2200"/>
@@ -29107,10 +29655,12 @@
             </a:r>
           </a:p>
           <a:p>
-            <a:pPr>
+            <a:pPr lvl="0" marL="457200" indent="-228600">
+              <a:buFont typeface="Calibri"/>
               <a:spcAft>
                 <a:spcPts val="1000"/>
               </a:spcAft>
+              <a:buSzPct val="100000"/>
               <a:buChar char="•"/>
               <a:lnSpc>
                 <a:spcPts val="2200"/>
@@ -29127,10 +29677,12 @@
             </a:r>
           </a:p>
           <a:p>
-            <a:pPr>
+            <a:pPr lvl="0" marL="457200" indent="-228600">
+              <a:buFont typeface="Calibri"/>
               <a:spcAft>
                 <a:spcPts val="1000"/>
               </a:spcAft>
+              <a:buSzPct val="100000"/>
               <a:buChar char="•"/>
               <a:lnSpc>
                 <a:spcPts val="2200"/>
@@ -29147,10 +29699,12 @@
             </a:r>
           </a:p>
           <a:p>
-            <a:pPr>
+            <a:pPr lvl="0" marL="457200" indent="-228600">
+              <a:buFont typeface="Calibri"/>
               <a:spcAft>
                 <a:spcPts val="1000"/>
               </a:spcAft>
+              <a:buSzPct val="100000"/>
               <a:buChar char="•"/>
               <a:lnSpc>
                 <a:spcPts val="2200"/>
@@ -29286,10 +29840,12 @@
           </a:bodyPr>
           <a:lstStyle/>
           <a:p>
-            <a:pPr>
+            <a:pPr lvl="0" marL="457200" indent="-228600">
+              <a:buFont typeface="Calibri"/>
               <a:spcAft>
                 <a:spcPts val="1000"/>
               </a:spcAft>
+              <a:buSzPct val="100000"/>
               <a:buChar char="•"/>
               <a:lnSpc>
                 <a:spcPts val="2200"/>
@@ -29306,10 +29862,12 @@
             </a:r>
           </a:p>
           <a:p>
-            <a:pPr>
+            <a:pPr lvl="0" marL="457200" indent="-228600">
+              <a:buFont typeface="Calibri"/>
               <a:spcAft>
                 <a:spcPts val="1000"/>
               </a:spcAft>
+              <a:buSzPct val="100000"/>
               <a:buChar char="•"/>
               <a:lnSpc>
                 <a:spcPts val="2200"/>
@@ -29445,10 +30003,12 @@
           </a:bodyPr>
           <a:lstStyle/>
           <a:p>
-            <a:pPr>
+            <a:pPr lvl="0" marL="457200" indent="-228600">
+              <a:buFont typeface="Calibri"/>
               <a:spcAft>
                 <a:spcPts val="1000"/>
               </a:spcAft>
+              <a:buSzPct val="100000"/>
               <a:buChar char="•"/>
               <a:lnSpc>
                 <a:spcPts val="2200"/>
@@ -29465,10 +30025,12 @@
             </a:r>
           </a:p>
           <a:p>
-            <a:pPr>
+            <a:pPr lvl="0" marL="457200" indent="-228600">
+              <a:buFont typeface="Calibri"/>
               <a:spcAft>
                 <a:spcPts val="1000"/>
               </a:spcAft>
+              <a:buSzPct val="100000"/>
               <a:buChar char="•"/>
               <a:lnSpc>
                 <a:spcPts val="2200"/>
@@ -29604,10 +30166,12 @@
           </a:bodyPr>
           <a:lstStyle/>
           <a:p>
-            <a:pPr>
+            <a:pPr lvl="0" marL="457200" indent="-228600">
+              <a:buFont typeface="Calibri"/>
               <a:spcAft>
                 <a:spcPts val="1000"/>
               </a:spcAft>
+              <a:buSzPct val="100000"/>
               <a:buChar char="•"/>
               <a:lnSpc>
                 <a:spcPts val="2200"/>
@@ -29743,10 +30307,12 @@
           </a:bodyPr>
           <a:lstStyle/>
           <a:p>
-            <a:pPr>
+            <a:pPr lvl="0" marL="457200" indent="-228600">
+              <a:buFont typeface="Calibri"/>
               <a:spcAft>
                 <a:spcPts val="1000"/>
               </a:spcAft>
+              <a:buSzPct val="100000"/>
               <a:buChar char="•"/>
               <a:lnSpc>
                 <a:spcPts val="2200"/>
@@ -29763,10 +30329,12 @@
             </a:r>
           </a:p>
           <a:p>
-            <a:pPr>
+            <a:pPr lvl="0" marL="457200" indent="-228600">
+              <a:buFont typeface="Calibri"/>
               <a:spcAft>
                 <a:spcPts val="1000"/>
               </a:spcAft>
+              <a:buSzPct val="100000"/>
               <a:buChar char="•"/>
               <a:lnSpc>
                 <a:spcPts val="2200"/>
@@ -29902,10 +30470,12 @@
           </a:bodyPr>
           <a:lstStyle/>
           <a:p>
-            <a:pPr>
+            <a:pPr lvl="0" marL="457200" indent="-228600">
+              <a:buFont typeface="Calibri"/>
               <a:spcAft>
                 <a:spcPts val="1000"/>
               </a:spcAft>
+              <a:buSzPct val="100000"/>
               <a:buChar char="•"/>
               <a:lnSpc>
                 <a:spcPts val="2200"/>
@@ -29922,10 +30492,12 @@
             </a:r>
           </a:p>
           <a:p>
-            <a:pPr>
+            <a:pPr lvl="0" marL="457200" indent="-228600">
+              <a:buFont typeface="Calibri"/>
               <a:spcAft>
                 <a:spcPts val="1000"/>
               </a:spcAft>
+              <a:buSzPct val="100000"/>
               <a:buChar char="•"/>
               <a:lnSpc>
                 <a:spcPts val="2200"/>
@@ -29942,10 +30514,12 @@
             </a:r>
           </a:p>
           <a:p>
-            <a:pPr>
+            <a:pPr lvl="0" marL="457200" indent="-228600">
+              <a:buFont typeface="Calibri"/>
               <a:spcAft>
                 <a:spcPts val="1000"/>
               </a:spcAft>
+              <a:buSzPct val="100000"/>
               <a:buChar char="•"/>
               <a:lnSpc>
                 <a:spcPts val="2200"/>
@@ -30081,10 +30655,12 @@
           </a:bodyPr>
           <a:lstStyle/>
           <a:p>
-            <a:pPr>
+            <a:pPr lvl="0" marL="457200" indent="-228600">
+              <a:buFont typeface="Calibri"/>
               <a:spcAft>
                 <a:spcPts val="1000"/>
               </a:spcAft>
+              <a:buSzPct val="100000"/>
               <a:buChar char="•"/>
               <a:lnSpc>
                 <a:spcPts val="2200"/>
@@ -30101,10 +30677,12 @@
             </a:r>
           </a:p>
           <a:p>
-            <a:pPr>
+            <a:pPr lvl="0" marL="457200" indent="-228600">
+              <a:buFont typeface="Calibri"/>
               <a:spcAft>
                 <a:spcPts val="1000"/>
               </a:spcAft>
+              <a:buSzPct val="100000"/>
               <a:buChar char="•"/>
               <a:lnSpc>
                 <a:spcPts val="2200"/>
@@ -30121,10 +30699,12 @@
             </a:r>
           </a:p>
           <a:p>
-            <a:pPr>
+            <a:pPr lvl="0" marL="457200" indent="-228600">
+              <a:buFont typeface="Calibri"/>
               <a:spcAft>
                 <a:spcPts val="1000"/>
               </a:spcAft>
+              <a:buSzPct val="100000"/>
               <a:buChar char="•"/>
               <a:lnSpc>
                 <a:spcPts val="2200"/>
@@ -30141,10 +30721,12 @@
             </a:r>
           </a:p>
           <a:p>
-            <a:pPr>
+            <a:pPr lvl="0" marL="457200" indent="-228600">
+              <a:buFont typeface="Calibri"/>
               <a:spcAft>
                 <a:spcPts val="1000"/>
               </a:spcAft>
+              <a:buSzPct val="100000"/>
               <a:buChar char="•"/>
               <a:lnSpc>
                 <a:spcPts val="2200"/>
@@ -30161,10 +30743,12 @@
             </a:r>
           </a:p>
           <a:p>
-            <a:pPr>
+            <a:pPr lvl="0" marL="457200" indent="-228600">
+              <a:buFont typeface="Calibri"/>
               <a:spcAft>
                 <a:spcPts val="1000"/>
               </a:spcAft>
+              <a:buSzPct val="100000"/>
               <a:buChar char="•"/>
               <a:lnSpc>
                 <a:spcPts val="2200"/>
@@ -30300,10 +30884,12 @@
           </a:bodyPr>
           <a:lstStyle/>
           <a:p>
-            <a:pPr>
+            <a:pPr lvl="0" marL="457200" indent="-228600">
+              <a:buFont typeface="Calibri"/>
               <a:spcAft>
                 <a:spcPts val="1000"/>
               </a:spcAft>
+              <a:buSzPct val="100000"/>
               <a:buChar char="•"/>
               <a:lnSpc>
                 <a:spcPts val="2200"/>
@@ -30320,10 +30906,12 @@
             </a:r>
           </a:p>
           <a:p>
-            <a:pPr>
+            <a:pPr lvl="0" marL="457200" indent="-228600">
+              <a:buFont typeface="Calibri"/>
               <a:spcAft>
                 <a:spcPts val="1000"/>
               </a:spcAft>
+              <a:buSzPct val="100000"/>
               <a:buChar char="•"/>
               <a:lnSpc>
                 <a:spcPts val="2200"/>
@@ -30459,10 +31047,12 @@
           </a:bodyPr>
           <a:lstStyle/>
           <a:p>
-            <a:pPr>
+            <a:pPr lvl="0" marL="457200" indent="-228600">
+              <a:buFont typeface="Calibri"/>
               <a:spcAft>
                 <a:spcPts val="1000"/>
               </a:spcAft>
+              <a:buSzPct val="100000"/>
               <a:buChar char="•"/>
               <a:lnSpc>
                 <a:spcPts val="2200"/>
@@ -30479,10 +31069,12 @@
             </a:r>
           </a:p>
           <a:p>
-            <a:pPr>
+            <a:pPr lvl="0" marL="457200" indent="-228600">
+              <a:buFont typeface="Calibri"/>
               <a:spcAft>
                 <a:spcPts val="1000"/>
               </a:spcAft>
+              <a:buSzPct val="100000"/>
               <a:buChar char="•"/>
               <a:lnSpc>
                 <a:spcPts val="2200"/>
@@ -30499,10 +31091,12 @@
             </a:r>
           </a:p>
           <a:p>
-            <a:pPr>
+            <a:pPr lvl="0" marL="457200" indent="-228600">
+              <a:buFont typeface="Calibri"/>
               <a:spcAft>
                 <a:spcPts val="1000"/>
               </a:spcAft>
+              <a:buSzPct val="100000"/>
               <a:buChar char="•"/>
               <a:lnSpc>
                 <a:spcPts val="2200"/>
@@ -30519,10 +31113,12 @@
             </a:r>
           </a:p>
           <a:p>
-            <a:pPr>
+            <a:pPr lvl="0" marL="457200" indent="-228600">
+              <a:buFont typeface="Calibri"/>
               <a:spcAft>
                 <a:spcPts val="1000"/>
               </a:spcAft>
+              <a:buSzPct val="100000"/>
               <a:buChar char="•"/>
               <a:lnSpc>
                 <a:spcPts val="2200"/>
@@ -30658,10 +31254,12 @@
           </a:bodyPr>
           <a:lstStyle/>
           <a:p>
-            <a:pPr>
+            <a:pPr lvl="0" marL="457200" indent="-228600">
+              <a:buFont typeface="Calibri"/>
               <a:spcAft>
                 <a:spcPts val="1000"/>
               </a:spcAft>
+              <a:buSzPct val="100000"/>
               <a:buChar char="•"/>
               <a:lnSpc>
                 <a:spcPts val="2200"/>
@@ -30678,10 +31276,12 @@
             </a:r>
           </a:p>
           <a:p>
-            <a:pPr>
+            <a:pPr lvl="0" marL="457200" indent="-228600">
+              <a:buFont typeface="Calibri"/>
               <a:spcAft>
                 <a:spcPts val="1000"/>
               </a:spcAft>
+              <a:buSzPct val="100000"/>
               <a:buChar char="•"/>
               <a:lnSpc>
                 <a:spcPts val="2200"/>
@@ -30698,10 +31298,12 @@
             </a:r>
           </a:p>
           <a:p>
-            <a:pPr>
+            <a:pPr lvl="0" marL="457200" indent="-228600">
+              <a:buFont typeface="Calibri"/>
               <a:spcAft>
                 <a:spcPts val="1000"/>
               </a:spcAft>
+              <a:buSzPct val="100000"/>
               <a:buChar char="•"/>
               <a:lnSpc>
                 <a:spcPts val="2200"/>
